--- a/curso/pptx/S15.pptx
+++ b/curso/pptx/S15.pptx
@@ -3892,8 +3892,8 @@
         </p:nvSpPr>
         <p:spPr>
           <a:xfrm>
-            <a:off x="640000" y="420000"/>
-            <a:ext cx="10912000" cy="420000"/>
+            <a:off x="10652000" y="380000"/>
+            <a:ext cx="900000" cy="800000"/>
           </a:xfrm>
           <a:prstGeom prst="rect">
             <a:avLst/>
@@ -3908,17 +3908,17 @@
           <a:p>
             <a:pPr>
               <a:spcAft>
-                <a:spcPts val="810"/>
-              </a:spcAft>
-            </a:pPr>
-            <a:r>
-              <a:rPr sz="1800" b="1">
+                <a:spcPts val="1980"/>
+              </a:spcAft>
+            </a:pPr>
+            <a:r>
+              <a:rPr sz="4400" b="0">
                 <a:solidFill>
                   <a:srgbClr val="1F2A44"/>
                 </a:solidFill>
                 <a:latin typeface="Nunito Sans"/>
               </a:rPr>
-              <a:t>🦉 Aula de Filosofía</a:t>
+              <a:t>🙃</a:t>
             </a:r>
           </a:p>
         </p:txBody>

--- a/curso/pptx/S15.pptx
+++ b/curso/pptx/S15.pptx
@@ -473,426 +473,6 @@
     </a:lvl9pPr>
   </p:notesStyle>
 </p:notesMaster>
-</file>
-
-<file path=ppt/notesSlides/notesSlide1.xml><?xml version="1.0" encoding="utf-8"?>
-<p:notes xmlns:a="http://schemas.openxmlformats.org/drawingml/2006/main" xmlns:p="http://schemas.openxmlformats.org/presentationml/2006/main" xmlns:r="http://schemas.openxmlformats.org/officeDocument/2006/relationships">
-  <p:cSld>
-    <p:spTree>
-      <p:nvGrpSpPr>
-        <p:cNvPr id="1" name=""/>
-        <p:cNvGrpSpPr/>
-        <p:nvPr/>
-      </p:nvGrpSpPr>
-      <p:grpSpPr>
-        <a:xfrm>
-          <a:off x="0" y="0"/>
-          <a:ext cx="0" cy="0"/>
-          <a:chOff x="0" y="0"/>
-          <a:chExt cx="0" cy="0"/>
-        </a:xfrm>
-      </p:grpSpPr>
-      <p:sp>
-        <p:nvSpPr>
-          <p:cNvPr id="2" name="Slide Image Placeholder 1"/>
-          <p:cNvSpPr>
-            <a:spLocks noGrp="1"/>
-          </p:cNvSpPr>
-          <p:nvPr>
-            <p:ph type="sldImg" idx="2"/>
-          </p:nvPr>
-        </p:nvSpPr>
-        <p:spPr/>
-      </p:sp>
-      <p:sp>
-        <p:nvSpPr>
-          <p:cNvPr id="3" name="Notes Placeholder 2"/>
-          <p:cNvSpPr>
-            <a:spLocks noGrp="1"/>
-          </p:cNvSpPr>
-          <p:nvPr>
-            <p:ph type="body" idx="3" sz="quarter"/>
-          </p:nvPr>
-        </p:nvSpPr>
-        <p:spPr/>
-        <p:txBody>
-          <a:bodyPr/>
-          <a:lstStyle/>
-          <a:p>
-            <a:r>
-              <a:t>3 minutos. Sin apuntes. Es para recordar, no cuenta para nota.</a:t>
-            </a:r>
-          </a:p>
-        </p:txBody>
-      </p:sp>
-      <p:sp>
-        <p:nvSpPr>
-          <p:cNvPr id="4" name="Slide Number Placeholder 3"/>
-          <p:cNvSpPr>
-            <a:spLocks noGrp="1"/>
-          </p:cNvSpPr>
-          <p:nvPr>
-            <p:ph type="sldNum" idx="5" sz="quarter"/>
-          </p:nvPr>
-        </p:nvSpPr>
-        <p:spPr/>
-      </p:sp>
-    </p:spTree>
-  </p:cSld>
-  <p:clrMapOvr>
-    <a:masterClrMapping/>
-  </p:clrMapOvr>
-</p:notes>
-</file>
-
-<file path=ppt/notesSlides/notesSlide2.xml><?xml version="1.0" encoding="utf-8"?>
-<p:notes xmlns:a="http://schemas.openxmlformats.org/drawingml/2006/main" xmlns:p="http://schemas.openxmlformats.org/presentationml/2006/main" xmlns:r="http://schemas.openxmlformats.org/officeDocument/2006/relationships">
-  <p:cSld>
-    <p:spTree>
-      <p:nvGrpSpPr>
-        <p:cNvPr id="1" name=""/>
-        <p:cNvGrpSpPr/>
-        <p:nvPr/>
-      </p:nvGrpSpPr>
-      <p:grpSpPr>
-        <a:xfrm>
-          <a:off x="0" y="0"/>
-          <a:ext cx="0" cy="0"/>
-          <a:chOff x="0" y="0"/>
-          <a:chExt cx="0" cy="0"/>
-        </a:xfrm>
-      </p:grpSpPr>
-      <p:sp>
-        <p:nvSpPr>
-          <p:cNvPr id="2" name="Slide Image Placeholder 1"/>
-          <p:cNvSpPr>
-            <a:spLocks noGrp="1"/>
-          </p:cNvSpPr>
-          <p:nvPr>
-            <p:ph type="sldImg" idx="2"/>
-          </p:nvPr>
-        </p:nvSpPr>
-        <p:spPr/>
-      </p:sp>
-      <p:sp>
-        <p:nvSpPr>
-          <p:cNvPr id="3" name="Notes Placeholder 2"/>
-          <p:cNvSpPr>
-            <a:spLocks noGrp="1"/>
-          </p:cNvSpPr>
-          <p:nvPr>
-            <p:ph type="body" idx="3" sz="quarter"/>
-          </p:nvPr>
-        </p:nvSpPr>
-        <p:spPr/>
-        <p:txBody>
-          <a:bodyPr/>
-          <a:lstStyle/>
-          <a:p>
-            <a:r>
-              <a:t>3 minutos. Sin apuntes. Es para recordar, no cuenta para nota.</a:t>
-            </a:r>
-          </a:p>
-        </p:txBody>
-      </p:sp>
-      <p:sp>
-        <p:nvSpPr>
-          <p:cNvPr id="4" name="Slide Number Placeholder 3"/>
-          <p:cNvSpPr>
-            <a:spLocks noGrp="1"/>
-          </p:cNvSpPr>
-          <p:nvPr>
-            <p:ph type="sldNum" idx="5" sz="quarter"/>
-          </p:nvPr>
-        </p:nvSpPr>
-        <p:spPr/>
-      </p:sp>
-    </p:spTree>
-  </p:cSld>
-  <p:clrMapOvr>
-    <a:masterClrMapping/>
-  </p:clrMapOvr>
-</p:notes>
-</file>
-
-<file path=ppt/notesSlides/notesSlide3.xml><?xml version="1.0" encoding="utf-8"?>
-<p:notes xmlns:a="http://schemas.openxmlformats.org/drawingml/2006/main" xmlns:p="http://schemas.openxmlformats.org/presentationml/2006/main" xmlns:r="http://schemas.openxmlformats.org/officeDocument/2006/relationships">
-  <p:cSld>
-    <p:spTree>
-      <p:nvGrpSpPr>
-        <p:cNvPr id="1" name=""/>
-        <p:cNvGrpSpPr/>
-        <p:nvPr/>
-      </p:nvGrpSpPr>
-      <p:grpSpPr>
-        <a:xfrm>
-          <a:off x="0" y="0"/>
-          <a:ext cx="0" cy="0"/>
-          <a:chOff x="0" y="0"/>
-          <a:chExt cx="0" cy="0"/>
-        </a:xfrm>
-      </p:grpSpPr>
-      <p:sp>
-        <p:nvSpPr>
-          <p:cNvPr id="2" name="Slide Image Placeholder 1"/>
-          <p:cNvSpPr>
-            <a:spLocks noGrp="1"/>
-          </p:cNvSpPr>
-          <p:nvPr>
-            <p:ph type="sldImg" idx="2"/>
-          </p:nvPr>
-        </p:nvSpPr>
-        <p:spPr/>
-      </p:sp>
-      <p:sp>
-        <p:nvSpPr>
-          <p:cNvPr id="3" name="Notes Placeholder 2"/>
-          <p:cNvSpPr>
-            <a:spLocks noGrp="1"/>
-          </p:cNvSpPr>
-          <p:nvPr>
-            <p:ph type="body" idx="3" sz="quarter"/>
-          </p:nvPr>
-        </p:nvSpPr>
-        <p:spPr/>
-        <p:txBody>
-          <a:bodyPr/>
-          <a:lstStyle/>
-          <a:p>
-            <a:r>
-              <a:t>Nadie tiene que contestar: solo pensarlo.</a:t>
-            </a:r>
-          </a:p>
-        </p:txBody>
-      </p:sp>
-      <p:sp>
-        <p:nvSpPr>
-          <p:cNvPr id="4" name="Slide Number Placeholder 3"/>
-          <p:cNvSpPr>
-            <a:spLocks noGrp="1"/>
-          </p:cNvSpPr>
-          <p:nvPr>
-            <p:ph type="sldNum" idx="5" sz="quarter"/>
-          </p:nvPr>
-        </p:nvSpPr>
-        <p:spPr/>
-      </p:sp>
-    </p:spTree>
-  </p:cSld>
-  <p:clrMapOvr>
-    <a:masterClrMapping/>
-  </p:clrMapOvr>
-</p:notes>
-</file>
-
-<file path=ppt/notesSlides/notesSlide4.xml><?xml version="1.0" encoding="utf-8"?>
-<p:notes xmlns:a="http://schemas.openxmlformats.org/drawingml/2006/main" xmlns:p="http://schemas.openxmlformats.org/presentationml/2006/main" xmlns:r="http://schemas.openxmlformats.org/officeDocument/2006/relationships">
-  <p:cSld>
-    <p:spTree>
-      <p:nvGrpSpPr>
-        <p:cNvPr id="1" name=""/>
-        <p:cNvGrpSpPr/>
-        <p:nvPr/>
-      </p:nvGrpSpPr>
-      <p:grpSpPr>
-        <a:xfrm>
-          <a:off x="0" y="0"/>
-          <a:ext cx="0" cy="0"/>
-          <a:chOff x="0" y="0"/>
-          <a:chExt cx="0" cy="0"/>
-        </a:xfrm>
-      </p:grpSpPr>
-      <p:sp>
-        <p:nvSpPr>
-          <p:cNvPr id="2" name="Slide Image Placeholder 1"/>
-          <p:cNvSpPr>
-            <a:spLocks noGrp="1"/>
-          </p:cNvSpPr>
-          <p:nvPr>
-            <p:ph type="sldImg" idx="2"/>
-          </p:nvPr>
-        </p:nvSpPr>
-        <p:spPr/>
-      </p:sp>
-      <p:sp>
-        <p:nvSpPr>
-          <p:cNvPr id="3" name="Notes Placeholder 2"/>
-          <p:cNvSpPr>
-            <a:spLocks noGrp="1"/>
-          </p:cNvSpPr>
-          <p:nvPr>
-            <p:ph type="body" idx="3" sz="quarter"/>
-          </p:nvPr>
-        </p:nvSpPr>
-        <p:spPr/>
-        <p:txBody>
-          <a:bodyPr/>
-          <a:lstStyle/>
-          <a:p>
-            <a:r>
-              <a:t>Dejar unos segundos para que piensen la respuesta fácil antes de enseñar los pasos.</a:t>
-            </a:r>
-          </a:p>
-        </p:txBody>
-      </p:sp>
-      <p:sp>
-        <p:nvSpPr>
-          <p:cNvPr id="4" name="Slide Number Placeholder 3"/>
-          <p:cNvSpPr>
-            <a:spLocks noGrp="1"/>
-          </p:cNvSpPr>
-          <p:nvPr>
-            <p:ph type="sldNum" idx="5" sz="quarter"/>
-          </p:nvPr>
-        </p:nvSpPr>
-        <p:spPr/>
-      </p:sp>
-    </p:spTree>
-  </p:cSld>
-  <p:clrMapOvr>
-    <a:masterClrMapping/>
-  </p:clrMapOvr>
-</p:notes>
-</file>
-
-<file path=ppt/notesSlides/notesSlide5.xml><?xml version="1.0" encoding="utf-8"?>
-<p:notes xmlns:a="http://schemas.openxmlformats.org/drawingml/2006/main" xmlns:p="http://schemas.openxmlformats.org/presentationml/2006/main" xmlns:r="http://schemas.openxmlformats.org/officeDocument/2006/relationships">
-  <p:cSld>
-    <p:spTree>
-      <p:nvGrpSpPr>
-        <p:cNvPr id="1" name=""/>
-        <p:cNvGrpSpPr/>
-        <p:nvPr/>
-      </p:nvGrpSpPr>
-      <p:grpSpPr>
-        <a:xfrm>
-          <a:off x="0" y="0"/>
-          <a:ext cx="0" cy="0"/>
-          <a:chOff x="0" y="0"/>
-          <a:chExt cx="0" cy="0"/>
-        </a:xfrm>
-      </p:grpSpPr>
-      <p:sp>
-        <p:nvSpPr>
-          <p:cNvPr id="2" name="Slide Image Placeholder 1"/>
-          <p:cNvSpPr>
-            <a:spLocks noGrp="1"/>
-          </p:cNvSpPr>
-          <p:nvPr>
-            <p:ph type="sldImg" idx="2"/>
-          </p:nvPr>
-        </p:nvSpPr>
-        <p:spPr/>
-      </p:sp>
-      <p:sp>
-        <p:nvSpPr>
-          <p:cNvPr id="3" name="Notes Placeholder 2"/>
-          <p:cNvSpPr>
-            <a:spLocks noGrp="1"/>
-          </p:cNvSpPr>
-          <p:nvPr>
-            <p:ph type="body" idx="3" sz="quarter"/>
-          </p:nvPr>
-        </p:nvSpPr>
-        <p:spPr/>
-        <p:txBody>
-          <a:bodyPr/>
-          <a:lstStyle/>
-          <a:p>
-            <a:r>
-              <a:t>Dejar 2 minutos para que lo escriban. La diapositiva siguiente muestra el resumen.</a:t>
-            </a:r>
-          </a:p>
-        </p:txBody>
-      </p:sp>
-      <p:sp>
-        <p:nvSpPr>
-          <p:cNvPr id="4" name="Slide Number Placeholder 3"/>
-          <p:cNvSpPr>
-            <a:spLocks noGrp="1"/>
-          </p:cNvSpPr>
-          <p:nvPr>
-            <p:ph type="sldNum" idx="5" sz="quarter"/>
-          </p:nvPr>
-        </p:nvSpPr>
-        <p:spPr/>
-      </p:sp>
-    </p:spTree>
-  </p:cSld>
-  <p:clrMapOvr>
-    <a:masterClrMapping/>
-  </p:clrMapOvr>
-</p:notes>
-</file>
-
-<file path=ppt/notesSlides/notesSlide6.xml><?xml version="1.0" encoding="utf-8"?>
-<p:notes xmlns:a="http://schemas.openxmlformats.org/drawingml/2006/main" xmlns:p="http://schemas.openxmlformats.org/presentationml/2006/main" xmlns:r="http://schemas.openxmlformats.org/officeDocument/2006/relationships">
-  <p:cSld>
-    <p:spTree>
-      <p:nvGrpSpPr>
-        <p:cNvPr id="1" name=""/>
-        <p:cNvGrpSpPr/>
-        <p:nvPr/>
-      </p:nvGrpSpPr>
-      <p:grpSpPr>
-        <a:xfrm>
-          <a:off x="0" y="0"/>
-          <a:ext cx="0" cy="0"/>
-          <a:chOff x="0" y="0"/>
-          <a:chExt cx="0" cy="0"/>
-        </a:xfrm>
-      </p:grpSpPr>
-      <p:sp>
-        <p:nvSpPr>
-          <p:cNvPr id="2" name="Slide Image Placeholder 1"/>
-          <p:cNvSpPr>
-            <a:spLocks noGrp="1"/>
-          </p:cNvSpPr>
-          <p:nvPr>
-            <p:ph type="sldImg" idx="2"/>
-          </p:nvPr>
-        </p:nvSpPr>
-        <p:spPr/>
-      </p:sp>
-      <p:sp>
-        <p:nvSpPr>
-          <p:cNvPr id="3" name="Notes Placeholder 2"/>
-          <p:cNvSpPr>
-            <a:spLocks noGrp="1"/>
-          </p:cNvSpPr>
-          <p:nvPr>
-            <p:ph type="body" idx="3" sz="quarter"/>
-          </p:nvPr>
-        </p:nvSpPr>
-        <p:spPr/>
-        <p:txBody>
-          <a:bodyPr/>
-          <a:lstStyle/>
-          <a:p>
-            <a:r>
-              <a:t>Buscar: «falacia del hombre de paja» · «hombre de paja ejemplos»</a:t>
-            </a:r>
-          </a:p>
-        </p:txBody>
-      </p:sp>
-      <p:sp>
-        <p:nvSpPr>
-          <p:cNvPr id="4" name="Slide Number Placeholder 3"/>
-          <p:cNvSpPr>
-            <a:spLocks noGrp="1"/>
-          </p:cNvSpPr>
-          <p:nvPr>
-            <p:ph type="sldNum" idx="5" sz="quarter"/>
-          </p:nvPr>
-        </p:nvSpPr>
-        <p:spPr/>
-      </p:sp>
-    </p:spTree>
-  </p:cSld>
-  <p:clrMapOvr>
-    <a:masterClrMapping/>
-  </p:clrMapOvr>
-</p:notes>
 </file>
 
 <file path=ppt/slideLayouts/slideLayout1.xml><?xml version="1.0" encoding="utf-8"?>

--- a/curso/pptx/S15.pptx
+++ b/curso/pptx/S15.pptx
@@ -3801,7 +3801,7 @@
                 </a:solidFill>
                 <a:latin typeface="Nunito Sans"/>
               </a:rPr>
-              <a:t>Leire: «Podríamos dejar el móvil en la mochila durante la comida». Dylan: «Claro, tú quieres prohibir los móviles y volver a la Edad Media».</a:t>
+              <a:t>Una chica: «Podríamos dejar el móvil en la mochila durante la comida». Un chico: «Claro, tú quieres prohibir los móviles y volver a la Edad Media».</a:t>
             </a:r>
           </a:p>
         </p:txBody>
@@ -3849,7 +3849,7 @@
                 </a:solidFill>
                 <a:latin typeface="Nunito Sans"/>
               </a:rPr>
-              <a:t>¿Qué dijo Leire? Dejar el móvil en la mochila durante la comida.</a:t>
+              <a:t>¿Qué dijo la chica? Dejar el móvil en la mochila durante la comida.</a:t>
             </a:r>
           </a:p>
           <a:p>
@@ -3874,7 +3874,7 @@
                 </a:solidFill>
                 <a:latin typeface="Nunito Sans"/>
               </a:rPr>
-              <a:t>¿Qué ataca Dylan? «Prohibir los móviles» y «la Edad Media».</a:t>
+              <a:t>¿Qué ataca el chico? «Prohibir los móviles» y «la Edad Media».</a:t>
             </a:r>
           </a:p>
           <a:p>
@@ -3924,7 +3924,7 @@
                 </a:solidFill>
                 <a:latin typeface="Nunito Sans"/>
               </a:rPr>
-              <a:t>Conclusión: hombre de paja. La idea real de Leire sigue sin respuesta.</a:t>
+              <a:t>Conclusión: hombre de paja. La idea real de la chica sigue sin respuesta.</a:t>
             </a:r>
           </a:p>
         </p:txBody>
@@ -4110,7 +4110,7 @@
                 </a:solidFill>
                 <a:latin typeface="Nunito Sans"/>
               </a:rPr>
-              <a:t>Chen comenta en un vídeo: «Tenía demasiados anuncios». Otro usuario responde: «O sea, que los creadores deberían trabajar gratis. Qué fácil».</a:t>
+              <a:t>Un chico comenta en un vídeo: «Tenía demasiados anuncios». Otro usuario responde: «O sea, que los creadores deberían trabajar gratis. Qué fácil».</a:t>
             </a:r>
           </a:p>
         </p:txBody>
@@ -4158,7 +4158,7 @@
                 </a:solidFill>
                 <a:latin typeface="Nunito Sans"/>
               </a:rPr>
-              <a:t>¿Qué dijo Chen? Que había demasiados anuncios.</a:t>
+              <a:t>¿Qué dijo el chico? Que había demasiados anuncios.</a:t>
             </a:r>
           </a:p>
           <a:p>
@@ -4208,7 +4208,7 @@
                 </a:solidFill>
                 <a:latin typeface="Nunito Sans"/>
               </a:rPr>
-              <a:t>¿Dijo eso Chen? No: menos anuncios no es cero dinero.</a:t>
+              <a:t>¿Dijo eso el chico? No: menos anuncios no es cero dinero.</a:t>
             </a:r>
           </a:p>
           <a:p>
@@ -4419,7 +4419,7 @@
                 </a:solidFill>
                 <a:latin typeface="Nunito Sans"/>
               </a:rPr>
-              <a:t>Naiara: «Los deberes de los viernes deberían ser cortos». Omar: «Propones menos deberes el fin de semana. No estoy de acuerdo: el lunes hay examen».</a:t>
+              <a:t>Una chica: «Los deberes de los viernes deberían ser cortos». Un chico: «Propones menos deberes el fin de semana. No estoy de acuerdo: el lunes hay examen».</a:t>
             </a:r>
           </a:p>
         </p:txBody>
@@ -4467,7 +4467,7 @@
                 </a:solidFill>
                 <a:latin typeface="Nunito Sans"/>
               </a:rPr>
-              <a:t>¿Resume bien Omar? Sí: «cortos» es «menos deberes».</a:t>
+              <a:t>¿Resume bien el chico? Sí: «cortos» es «menos deberes».</a:t>
             </a:r>
           </a:p>
           <a:p>
@@ -5296,7 +5296,7 @@
                 </a:solidFill>
                 <a:latin typeface="Nunito Sans"/>
               </a:rPr>
-              <a:t>Aitor: «Los deberes no sirven para nada: hay que quitarlos todos». Maialen: «Aitor quiere quitar todos los deberes, y no estoy de acuerdo».</a:t>
+              <a:t>Un chico: «Los deberes no sirven para nada: hay que quitarlos todos». Una chica: «Este chico quiere quitar todos los deberes, y no estoy de acuerdo».</a:t>
             </a:r>
           </a:p>
         </p:txBody>
@@ -5394,7 +5394,7 @@
                 </a:solidFill>
                 <a:latin typeface="Nunito Sans"/>
               </a:rPr>
-              <a:t>Pero ¿lo dijo Aitor? Sí: «hay que quitarlos todos».</a:t>
+              <a:t>Pero ¿lo dijo el chico? Sí: «hay que quitarlos todos».</a:t>
             </a:r>
           </a:p>
           <a:p>
@@ -5419,7 +5419,7 @@
                 </a:solidFill>
                 <a:latin typeface="Nunito Sans"/>
               </a:rPr>
-              <a:t>Aitor diría: «sí, eso digo». Es un </a:t>
+              <a:t>El chico diría: «sí, eso digo». Es un </a:t>
             </a:r>
             <a:r>
               <a:rPr sz="2400" b="1">
@@ -6569,7 +6569,7 @@
                 </a:solidFill>
                 <a:latin typeface="Nunito Sans"/>
               </a:rPr>
-              <a:t>En latín, ad hominem significa «contra la ______».  (sesión 14)</a:t>
+              <a:t>El ataque a la persona habla de quien lo dice, no de la ______.  (sesión 14)</a:t>
             </a:r>
           </a:p>
           <a:p>
@@ -6771,7 +6771,7 @@
                 </a:solidFill>
                 <a:latin typeface="Nunito Sans"/>
               </a:rPr>
-              <a:t>En latín, ad hominem significa «contra la </a:t>
+              <a:t>El ataque a la persona habla de quien lo dice, no de la </a:t>
             </a:r>
             <a:r>
               <a:rPr sz="2600" b="1">
@@ -6780,7 +6780,7 @@
                 </a:solidFill>
                 <a:latin typeface="Nunito Sans"/>
               </a:rPr>
-              <a:t>persona</a:t>
+              <a:t>idea</a:t>
             </a:r>
             <a:r>
               <a:rPr sz="2600" b="0">
@@ -6789,7 +6789,7 @@
                 </a:solidFill>
                 <a:latin typeface="Nunito Sans"/>
               </a:rPr>
-              <a:t>».  (sesión 14)</a:t>
+              <a:t>.  (sesión 14)</a:t>
             </a:r>
           </a:p>
           <a:p>
@@ -7022,7 +7022,7 @@
                 </a:solidFill>
                 <a:latin typeface="Nunito Sans"/>
               </a:rPr>
-              <a:t>Leire: «Podríamos dejar el móvil en la mochila durante la comida». Dylan: «Claro, tú quieres prohibir los móviles y volver a la Edad Media».</a:t>
+              <a:t>Una chica: «Podríamos dejar el móvil en la mochila durante la comida». Un chico: «Claro, tú quieres prohibir los móviles y volver a la Edad Media».</a:t>
             </a:r>
           </a:p>
         </p:txBody>
@@ -7061,7 +7061,7 @@
                 </a:solidFill>
                 <a:latin typeface="Nunito Sans"/>
               </a:rPr>
-              <a:t>¿Ha dicho eso Leire? ¿Contra qué idea está peleando Dylan?</a:t>
+              <a:t>¿Ha dicho eso la chica? ¿Contra qué idea está peleando el chico?</a:t>
             </a:r>
           </a:p>
         </p:txBody>

--- a/curso/pptx/S15.pptx
+++ b/curso/pptx/S15.pptx
@@ -3537,7 +3537,7 @@
                 </a:solidFill>
                 <a:latin typeface="Nunito Sans"/>
               </a:rPr>
-              <a:t>PENSAMIENTO CRÍTICO · SESIÓN 15 · UNIDAD 3 · FALACIAS I: ATACAR, DESVIAR, EMOCIONAR</a:t>
+              <a:t>PENSAMIENTO CRÍTICO · SESIÓN 15 · UNIDAD 3 · ARGUMENTAR</a:t>
             </a:r>
           </a:p>
         </p:txBody>
@@ -3576,7 +3576,7 @@
                 </a:solidFill>
                 <a:latin typeface="Fredoka"/>
               </a:rPr>
-              <a:t>El hombre de paja</a:t>
+              <a:t>Buenas razones</a:t>
             </a:r>
           </a:p>
         </p:txBody>
@@ -3615,7 +3615,7 @@
                 </a:solidFill>
                 <a:latin typeface="Nunito Sans"/>
               </a:rPr>
-              <a:t>El hombre de paja deforma la idea del otro para atacar una versión más fácil de tumbar.</a:t>
+              <a:t>Una buena razón pasa tres preguntas: ¿es verdad?, ¿viene a cuento?, ¿es suficiente? Si falla una, no sirve para esa conclusión.</a:t>
             </a:r>
           </a:p>
         </p:txBody>
@@ -3634,7 +3634,7 @@
     <p:bg>
       <p:bgPr>
         <a:solidFill>
-          <a:srgbClr val="FBF7EF"/>
+          <a:srgbClr val="1F2A44"/>
         </a:solidFill>
         <a:effectLst/>
       </p:bgPr>
@@ -3654,8 +3654,8 @@
         </p:nvSpPr>
         <p:spPr>
           <a:xfrm>
-            <a:off x="640000" y="380000"/>
-            <a:ext cx="10912000" cy="420000"/>
+            <a:off x="640000" y="2300000"/>
+            <a:ext cx="10912000" cy="500000"/>
           </a:xfrm>
           <a:prstGeom prst="rect">
             <a:avLst/>
@@ -3670,17 +3670,17 @@
           <a:p>
             <a:pPr>
               <a:spcAft>
-                <a:spcPts val="630"/>
+                <a:spcPts val="810"/>
               </a:spcAft>
             </a:pPr>
             <a:r>
-              <a:rPr sz="1400" b="1">
-                <a:solidFill>
-                  <a:srgbClr val="E8793A"/>
-                </a:solidFill>
-                <a:latin typeface="Nunito Sans"/>
-              </a:rPr>
-              <a:t>BLOQUE 2 · CASOS RESUELTOS</a:t>
+              <a:rPr sz="1800" b="1">
+                <a:solidFill>
+                  <a:srgbClr val="F4B183"/>
+                </a:solidFill>
+                <a:latin typeface="Nunito Sans"/>
+              </a:rPr>
+              <a:t>BLOQUE 2</a:t>
             </a:r>
           </a:p>
         </p:txBody>
@@ -3693,7 +3693,7 @@
         </p:nvSpPr>
         <p:spPr>
           <a:xfrm>
-            <a:off x="640000" y="760000"/>
+            <a:off x="640000" y="2800000"/>
             <a:ext cx="10912000" cy="800000"/>
           </a:xfrm>
           <a:prstGeom prst="rect">
@@ -3709,222 +3709,17 @@
           <a:p>
             <a:pPr>
               <a:spcAft>
-                <a:spcPts val="1710"/>
+                <a:spcPts val="2160"/>
               </a:spcAft>
             </a:pPr>
             <a:r>
-              <a:rPr sz="3800" b="1">
-                <a:solidFill>
-                  <a:srgbClr val="1F2A44"/>
+              <a:rPr sz="4800" b="1">
+                <a:solidFill>
+                  <a:srgbClr val="FBF7EF"/>
                 </a:solidFill>
                 <a:latin typeface="Fredoka"/>
               </a:rPr>
-              <a:t>Caso 1 · El móvil en la comida</a:t>
-            </a:r>
-          </a:p>
-        </p:txBody>
-      </p:sp>
-      <p:sp>
-        <p:nvSpPr>
-          <p:cNvPr id="4" name="Rectangle 3"/>
-          <p:cNvSpPr/>
-          <p:nvPr/>
-        </p:nvSpPr>
-        <p:spPr>
-          <a:xfrm>
-            <a:off x="640000" y="1600000"/>
-            <a:ext cx="10912000" cy="1100000"/>
-          </a:xfrm>
-          <a:prstGeom prst="rect">
-            <a:avLst/>
-          </a:prstGeom>
-          <a:solidFill>
-            <a:srgbClr val="FFFFFF"/>
-          </a:solidFill>
-          <a:ln>
-            <a:noFill/>
-          </a:ln>
-        </p:spPr>
-        <p:style>
-          <a:lnRef idx="1">
-            <a:schemeClr val="accent1"/>
-          </a:lnRef>
-          <a:fillRef idx="3">
-            <a:schemeClr val="accent1"/>
-          </a:fillRef>
-          <a:effectRef idx="2">
-            <a:schemeClr val="accent1"/>
-          </a:effectRef>
-          <a:fontRef idx="minor">
-            <a:schemeClr val="lt1"/>
-          </a:fontRef>
-        </p:style>
-        <p:txBody>
-          <a:bodyPr rtlCol="0" anchor="ctr"/>
-          <a:lstStyle/>
-          <a:p>
-            <a:pPr algn="ctr"/>
-          </a:p>
-        </p:txBody>
-      </p:sp>
-      <p:sp>
-        <p:nvSpPr>
-          <p:cNvPr id="5" name="TextBox 4"/>
-          <p:cNvSpPr txBox="1"/>
-          <p:nvPr/>
-        </p:nvSpPr>
-        <p:spPr>
-          <a:xfrm>
-            <a:off x="840000" y="1650000"/>
-            <a:ext cx="10512000" cy="1000000"/>
-          </a:xfrm>
-          <a:prstGeom prst="rect">
-            <a:avLst/>
-          </a:prstGeom>
-          <a:noFill/>
-        </p:spPr>
-        <p:txBody>
-          <a:bodyPr wrap="square" anchor="ctr">
-            <a:spAutoFit/>
-          </a:bodyPr>
-          <a:lstStyle/>
-          <a:p>
-            <a:pPr>
-              <a:spcAft>
-                <a:spcPts val="1170"/>
-              </a:spcAft>
-            </a:pPr>
-            <a:r>
-              <a:rPr sz="2600" b="1">
-                <a:solidFill>
-                  <a:srgbClr val="1F2A44"/>
-                </a:solidFill>
-                <a:latin typeface="Nunito Sans"/>
-              </a:rPr>
-              <a:t>Una chica: «Podríamos dejar el móvil en la mochila durante la comida». Un chico: «Claro, tú quieres prohibir los móviles y volver a la Edad Media».</a:t>
-            </a:r>
-          </a:p>
-        </p:txBody>
-      </p:sp>
-      <p:sp>
-        <p:nvSpPr>
-          <p:cNvPr id="6" name="TextBox 5"/>
-          <p:cNvSpPr txBox="1"/>
-          <p:nvPr/>
-        </p:nvSpPr>
-        <p:spPr>
-          <a:xfrm>
-            <a:off x="640000" y="2900000"/>
-            <a:ext cx="10912000" cy="3500000"/>
-          </a:xfrm>
-          <a:prstGeom prst="rect">
-            <a:avLst/>
-          </a:prstGeom>
-          <a:noFill/>
-        </p:spPr>
-        <p:txBody>
-          <a:bodyPr wrap="square">
-            <a:spAutoFit/>
-          </a:bodyPr>
-          <a:lstStyle/>
-          <a:p>
-            <a:pPr>
-              <a:spcAft>
-                <a:spcPts val="1080"/>
-              </a:spcAft>
-            </a:pPr>
-            <a:r>
-              <a:rPr sz="2400" b="1">
-                <a:solidFill>
-                  <a:srgbClr val="E8793A"/>
-                </a:solidFill>
-                <a:latin typeface="Nunito Sans"/>
-              </a:rPr>
-              <a:t>1. </a:t>
-            </a:r>
-            <a:r>
-              <a:rPr sz="2400" b="0">
-                <a:solidFill>
-                  <a:srgbClr val="1F2A44"/>
-                </a:solidFill>
-                <a:latin typeface="Nunito Sans"/>
-              </a:rPr>
-              <a:t>¿Qué dijo la chica? Dejar el móvil en la mochila durante la comida.</a:t>
-            </a:r>
-          </a:p>
-          <a:p>
-            <a:pPr>
-              <a:spcAft>
-                <a:spcPts val="1080"/>
-              </a:spcAft>
-            </a:pPr>
-            <a:r>
-              <a:rPr sz="2400" b="1">
-                <a:solidFill>
-                  <a:srgbClr val="E8793A"/>
-                </a:solidFill>
-                <a:latin typeface="Nunito Sans"/>
-              </a:rPr>
-              <a:t>2. </a:t>
-            </a:r>
-            <a:r>
-              <a:rPr sz="2400" b="0">
-                <a:solidFill>
-                  <a:srgbClr val="1F2A44"/>
-                </a:solidFill>
-                <a:latin typeface="Nunito Sans"/>
-              </a:rPr>
-              <a:t>¿Qué ataca el chico? «Prohibir los móviles» y «la Edad Media».</a:t>
-            </a:r>
-          </a:p>
-          <a:p>
-            <a:pPr>
-              <a:spcAft>
-                <a:spcPts val="1080"/>
-              </a:spcAft>
-            </a:pPr>
-            <a:r>
-              <a:rPr sz="2400" b="1">
-                <a:solidFill>
-                  <a:srgbClr val="E8793A"/>
-                </a:solidFill>
-                <a:latin typeface="Nunito Sans"/>
-              </a:rPr>
-              <a:t>3. </a:t>
-            </a:r>
-            <a:r>
-              <a:rPr sz="2400" b="0">
-                <a:solidFill>
-                  <a:srgbClr val="1F2A44"/>
-                </a:solidFill>
-                <a:latin typeface="Nunito Sans"/>
-              </a:rPr>
-              <a:t>¿Es lo mismo? No: es una versión exagerada, mucho más fácil de rechazar.</a:t>
-            </a:r>
-          </a:p>
-          <a:p>
-            <a:pPr>
-              <a:spcAft>
-                <a:spcPts val="1080"/>
-              </a:spcAft>
-            </a:pPr>
-            <a:r>
-              <a:rPr sz="2400" b="1">
-                <a:solidFill>
-                  <a:srgbClr val="E8793A"/>
-                </a:solidFill>
-                <a:latin typeface="Nunito Sans"/>
-              </a:rPr>
-              <a:t>4. </a:t>
-            </a:r>
-            <a:r>
-              <a:rPr sz="2400" b="0">
-                <a:solidFill>
-                  <a:srgbClr val="1F2A44"/>
-                </a:solidFill>
-                <a:latin typeface="Nunito Sans"/>
-              </a:rPr>
-              <a:t>Conclusión: hombre de paja. La idea real de la chica sigue sin respuesta.</a:t>
+              <a:t>Casos resueltos</a:t>
             </a:r>
           </a:p>
         </p:txBody>
@@ -4028,7 +3823,7 @@
                 </a:solidFill>
                 <a:latin typeface="Fredoka"/>
               </a:rPr>
-              <a:t>Caso 2 · Un comentario en YouTube</a:t>
+              <a:t>Caso 1 · Las zapatillas</a:t>
             </a:r>
           </a:p>
         </p:txBody>
@@ -4110,7 +3905,7 @@
                 </a:solidFill>
                 <a:latin typeface="Nunito Sans"/>
               </a:rPr>
-              <a:t>Un chico comenta en un vídeo: «Tenía demasiados anuncios». Otro usuario responde: «O sea, que los creadores deberían trabajar gratis. Qué fácil».</a:t>
+              <a:t>«Estas zapatillas son las mejores para correr: las anuncia un futbolista famoso.»</a:t>
             </a:r>
           </a:p>
         </p:txBody>
@@ -4158,7 +3953,7 @@
                 </a:solidFill>
                 <a:latin typeface="Nunito Sans"/>
               </a:rPr>
-              <a:t>¿Qué dijo el chico? Que había demasiados anuncios.</a:t>
+              <a:t>¿Es verdad? Sí: es verdad que las anuncia.</a:t>
             </a:r>
           </a:p>
           <a:p>
@@ -4183,7 +3978,7 @@
                 </a:solidFill>
                 <a:latin typeface="Nunito Sans"/>
               </a:rPr>
-              <a:t>¿Qué atacan? Que los creadores trabajen gratis.</a:t>
+              <a:t>¿Viene a cuento? No: anunciarlas no dice si son buenas para correr. Además, le pagan por hacerlo.</a:t>
             </a:r>
           </a:p>
           <a:p>
@@ -4208,7 +4003,7 @@
                 </a:solidFill>
                 <a:latin typeface="Nunito Sans"/>
               </a:rPr>
-              <a:t>¿Dijo eso el chico? No: menos anuncios no es cero dinero.</a:t>
+              <a:t>Ya ha fallado una: no hace falta seguir.</a:t>
             </a:r>
           </a:p>
           <a:p>
@@ -4233,7 +4028,25 @@
                 </a:solidFill>
                 <a:latin typeface="Nunito Sans"/>
               </a:rPr>
-              <a:t>Conclusión: hombre de paja por exageración.</a:t>
+              <a:t>Conclusión: es una </a:t>
+            </a:r>
+            <a:r>
+              <a:rPr sz="2400" b="1">
+                <a:solidFill>
+                  <a:srgbClr val="1F2A44"/>
+                </a:solidFill>
+                <a:latin typeface="Nunito Sans"/>
+              </a:rPr>
+              <a:t>mala razón</a:t>
+            </a:r>
+            <a:r>
+              <a:rPr sz="2400" b="0">
+                <a:solidFill>
+                  <a:srgbClr val="1F2A44"/>
+                </a:solidFill>
+                <a:latin typeface="Nunito Sans"/>
+              </a:rPr>
+              <a:t>, porque no viene a cuento.</a:t>
             </a:r>
           </a:p>
         </p:txBody>
@@ -4337,7 +4150,7 @@
                 </a:solidFill>
                 <a:latin typeface="Fredoka"/>
               </a:rPr>
-              <a:t>Caso 3 · Resumir bien no es hombre de paja</a:t>
+              <a:t>Caso 2 · Vuelta al principio</a:t>
             </a:r>
           </a:p>
         </p:txBody>
@@ -4419,7 +4232,7 @@
                 </a:solidFill>
                 <a:latin typeface="Nunito Sans"/>
               </a:rPr>
-              <a:t>Una chica: «Los deberes de los viernes deberían ser cortos». Un chico: «Propones menos deberes el fin de semana. No estoy de acuerdo: el lunes hay examen».</a:t>
+              <a:t>«Convencedme de que hoy no ponga deberes.» «Porque no.» «Porque eres el mejor profe.» «Porque mañana tenemos examen de Matemáticas.»</a:t>
             </a:r>
           </a:p>
         </p:txBody>
@@ -4467,7 +4280,7 @@
                 </a:solidFill>
                 <a:latin typeface="Nunito Sans"/>
               </a:rPr>
-              <a:t>¿Resume bien el chico? Sí: «cortos» es «menos deberes».</a:t>
+              <a:t>«Porque no»: no da ninguna razón. Solo repite la conclusión.</a:t>
             </a:r>
           </a:p>
           <a:p>
@@ -4492,7 +4305,7 @@
                 </a:solidFill>
                 <a:latin typeface="Nunito Sans"/>
               </a:rPr>
-              <a:t>¿Responde a la idea real? Sí, y da una razón: el examen del lunes.</a:t>
+              <a:t>«Porque eres el mejor profe»: es un halago. No viene a cuento con los deberes.</a:t>
             </a:r>
           </a:p>
           <a:p>
@@ -4517,7 +4330,7 @@
                 </a:solidFill>
                 <a:latin typeface="Nunito Sans"/>
               </a:rPr>
-              <a:t>No están de acuerdo, y eso está bien.</a:t>
+              <a:t>«Porque mañana hay examen»: es verdad, viene a cuento y puede bastar para pedir la tarde libre.</a:t>
             </a:r>
           </a:p>
           <a:p>
@@ -4542,7 +4355,25 @@
                 </a:solidFill>
                 <a:latin typeface="Nunito Sans"/>
               </a:rPr>
-              <a:t>Conclusión: no es hombre de paja. Discrepar de la idea real es legítimo.</a:t>
+              <a:t>Conclusión: solo la tercera es una </a:t>
+            </a:r>
+            <a:r>
+              <a:rPr sz="2400" b="1">
+                <a:solidFill>
+                  <a:srgbClr val="1F2A44"/>
+                </a:solidFill>
+                <a:latin typeface="Nunito Sans"/>
+              </a:rPr>
+              <a:t>buena razón</a:t>
+            </a:r>
+            <a:r>
+              <a:rPr sz="2400" b="0">
+                <a:solidFill>
+                  <a:srgbClr val="1F2A44"/>
+                </a:solidFill>
+                <a:latin typeface="Nunito Sans"/>
+              </a:rPr>
+              <a:t>.</a:t>
             </a:r>
           </a:p>
         </p:txBody>
@@ -4556,6 +4387,340 @@
 </file>
 
 <file path=ppt/slides/slide13.xml><?xml version="1.0" encoding="utf-8"?>
+<p:sld xmlns:a="http://schemas.openxmlformats.org/drawingml/2006/main" xmlns:p="http://schemas.openxmlformats.org/presentationml/2006/main" xmlns:r="http://schemas.openxmlformats.org/officeDocument/2006/relationships">
+  <p:cSld>
+    <p:bg>
+      <p:bgPr>
+        <a:solidFill>
+          <a:srgbClr val="F6C9A8"/>
+        </a:solidFill>
+        <a:effectLst/>
+      </p:bgPr>
+    </p:bg>
+    <p:spTree>
+      <p:nvGrpSpPr>
+        <p:cNvPr id="1" name=""/>
+        <p:cNvGrpSpPr/>
+        <p:nvPr/>
+      </p:nvGrpSpPr>
+      <p:grpSpPr/>
+      <p:sp>
+        <p:nvSpPr>
+          <p:cNvPr id="2" name="TextBox 1"/>
+          <p:cNvSpPr txBox="1"/>
+          <p:nvPr/>
+        </p:nvSpPr>
+        <p:spPr>
+          <a:xfrm>
+            <a:off x="640000" y="380000"/>
+            <a:ext cx="10912000" cy="420000"/>
+          </a:xfrm>
+          <a:prstGeom prst="rect">
+            <a:avLst/>
+          </a:prstGeom>
+          <a:noFill/>
+        </p:spPr>
+        <p:txBody>
+          <a:bodyPr wrap="square">
+            <a:spAutoFit/>
+          </a:bodyPr>
+          <a:lstStyle/>
+          <a:p>
+            <a:pPr>
+              <a:spcAft>
+                <a:spcPts val="630"/>
+              </a:spcAft>
+            </a:pPr>
+            <a:r>
+              <a:rPr sz="1400" b="1">
+                <a:solidFill>
+                  <a:srgbClr val="1F2A44"/>
+                </a:solidFill>
+                <a:latin typeface="Nunito Sans"/>
+              </a:rPr>
+              <a:t>CASO TRAMPA · BLOQUE 2 · CASOS RESUELTOS</a:t>
+            </a:r>
+          </a:p>
+        </p:txBody>
+      </p:sp>
+      <p:sp>
+        <p:nvSpPr>
+          <p:cNvPr id="3" name="TextBox 2"/>
+          <p:cNvSpPr txBox="1"/>
+          <p:nvPr/>
+        </p:nvSpPr>
+        <p:spPr>
+          <a:xfrm>
+            <a:off x="640000" y="760000"/>
+            <a:ext cx="10912000" cy="800000"/>
+          </a:xfrm>
+          <a:prstGeom prst="rect">
+            <a:avLst/>
+          </a:prstGeom>
+          <a:noFill/>
+        </p:spPr>
+        <p:txBody>
+          <a:bodyPr wrap="square">
+            <a:spAutoFit/>
+          </a:bodyPr>
+          <a:lstStyle/>
+          <a:p>
+            <a:pPr>
+              <a:spcAft>
+                <a:spcPts val="1710"/>
+              </a:spcAft>
+            </a:pPr>
+            <a:r>
+              <a:rPr sz="3800" b="1">
+                <a:solidFill>
+                  <a:srgbClr val="1F2A44"/>
+                </a:solidFill>
+                <a:latin typeface="Fredoka"/>
+              </a:rPr>
+              <a:t>⚠ ¿La altura no viene a cuento?</a:t>
+            </a:r>
+          </a:p>
+        </p:txBody>
+      </p:sp>
+      <p:sp>
+        <p:nvSpPr>
+          <p:cNvPr id="4" name="Rectangle 3"/>
+          <p:cNvSpPr/>
+          <p:nvPr/>
+        </p:nvSpPr>
+        <p:spPr>
+          <a:xfrm>
+            <a:off x="640000" y="1600000"/>
+            <a:ext cx="10912000" cy="1100000"/>
+          </a:xfrm>
+          <a:prstGeom prst="rect">
+            <a:avLst/>
+          </a:prstGeom>
+          <a:solidFill>
+            <a:srgbClr val="FBF7EF"/>
+          </a:solidFill>
+          <a:ln>
+            <a:noFill/>
+          </a:ln>
+        </p:spPr>
+        <p:style>
+          <a:lnRef idx="1">
+            <a:schemeClr val="accent1"/>
+          </a:lnRef>
+          <a:fillRef idx="3">
+            <a:schemeClr val="accent1"/>
+          </a:fillRef>
+          <a:effectRef idx="2">
+            <a:schemeClr val="accent1"/>
+          </a:effectRef>
+          <a:fontRef idx="minor">
+            <a:schemeClr val="lt1"/>
+          </a:fontRef>
+        </p:style>
+        <p:txBody>
+          <a:bodyPr rtlCol="0" anchor="ctr"/>
+          <a:lstStyle/>
+          <a:p>
+            <a:pPr algn="ctr"/>
+          </a:p>
+        </p:txBody>
+      </p:sp>
+      <p:sp>
+        <p:nvSpPr>
+          <p:cNvPr id="5" name="TextBox 4"/>
+          <p:cNvSpPr txBox="1"/>
+          <p:nvPr/>
+        </p:nvSpPr>
+        <p:spPr>
+          <a:xfrm>
+            <a:off x="840000" y="1650000"/>
+            <a:ext cx="10512000" cy="1000000"/>
+          </a:xfrm>
+          <a:prstGeom prst="rect">
+            <a:avLst/>
+          </a:prstGeom>
+          <a:noFill/>
+        </p:spPr>
+        <p:txBody>
+          <a:bodyPr wrap="square" anchor="ctr">
+            <a:spAutoFit/>
+          </a:bodyPr>
+          <a:lstStyle/>
+          <a:p>
+            <a:pPr>
+              <a:spcAft>
+                <a:spcPts val="1170"/>
+              </a:spcAft>
+            </a:pPr>
+            <a:r>
+              <a:rPr sz="2600" b="1">
+                <a:solidFill>
+                  <a:srgbClr val="1F2A44"/>
+                </a:solidFill>
+                <a:latin typeface="Nunito Sans"/>
+              </a:rPr>
+              <a:t>«Un chico debería ser nuestro portero: es el más alto de la clase.»</a:t>
+            </a:r>
+          </a:p>
+        </p:txBody>
+      </p:sp>
+      <p:sp>
+        <p:nvSpPr>
+          <p:cNvPr id="6" name="TextBox 5"/>
+          <p:cNvSpPr txBox="1"/>
+          <p:nvPr/>
+        </p:nvSpPr>
+        <p:spPr>
+          <a:xfrm>
+            <a:off x="640000" y="2900000"/>
+            <a:ext cx="10912000" cy="3500000"/>
+          </a:xfrm>
+          <a:prstGeom prst="rect">
+            <a:avLst/>
+          </a:prstGeom>
+          <a:noFill/>
+        </p:spPr>
+        <p:txBody>
+          <a:bodyPr wrap="square">
+            <a:spAutoFit/>
+          </a:bodyPr>
+          <a:lstStyle/>
+          <a:p>
+            <a:pPr>
+              <a:spcAft>
+                <a:spcPts val="1080"/>
+              </a:spcAft>
+            </a:pPr>
+            <a:r>
+              <a:rPr sz="2400" b="1">
+                <a:solidFill>
+                  <a:srgbClr val="E8793A"/>
+                </a:solidFill>
+                <a:latin typeface="Nunito Sans"/>
+              </a:rPr>
+              <a:t>1. </a:t>
+            </a:r>
+            <a:r>
+              <a:rPr sz="2400" b="0">
+                <a:solidFill>
+                  <a:srgbClr val="1F2A44"/>
+                </a:solidFill>
+                <a:latin typeface="Nunito Sans"/>
+              </a:rPr>
+              <a:t>Como con el delegado: la altura no viene a cuento, ¿verdad?</a:t>
+            </a:r>
+          </a:p>
+          <a:p>
+            <a:pPr>
+              <a:spcAft>
+                <a:spcPts val="1080"/>
+              </a:spcAft>
+            </a:pPr>
+            <a:r>
+              <a:rPr sz="2400" b="1">
+                <a:solidFill>
+                  <a:srgbClr val="E8793A"/>
+                </a:solidFill>
+                <a:latin typeface="Nunito Sans"/>
+              </a:rPr>
+              <a:t>2. </a:t>
+            </a:r>
+            <a:r>
+              <a:rPr sz="2400" b="0">
+                <a:solidFill>
+                  <a:srgbClr val="1F2A44"/>
+                </a:solidFill>
+                <a:latin typeface="Nunito Sans"/>
+              </a:rPr>
+              <a:t>Parece igual que lo del delegado: otra vez la altura.</a:t>
+            </a:r>
+          </a:p>
+          <a:p>
+            <a:pPr>
+              <a:spcAft>
+                <a:spcPts val="1080"/>
+              </a:spcAft>
+            </a:pPr>
+            <a:r>
+              <a:rPr sz="2400" b="1">
+                <a:solidFill>
+                  <a:srgbClr val="E8793A"/>
+                </a:solidFill>
+                <a:latin typeface="Nunito Sans"/>
+              </a:rPr>
+              <a:t>3. </a:t>
+            </a:r>
+            <a:r>
+              <a:rPr sz="2400" b="0">
+                <a:solidFill>
+                  <a:srgbClr val="1F2A44"/>
+                </a:solidFill>
+                <a:latin typeface="Nunito Sans"/>
+              </a:rPr>
+              <a:t>Pero la conclusión es otra. Un portero alto llega a más balones: aquí la altura sí importa.</a:t>
+            </a:r>
+          </a:p>
+          <a:p>
+            <a:pPr>
+              <a:spcAft>
+                <a:spcPts val="1080"/>
+              </a:spcAft>
+            </a:pPr>
+            <a:r>
+              <a:rPr sz="2400" b="1">
+                <a:solidFill>
+                  <a:srgbClr val="E8793A"/>
+                </a:solidFill>
+                <a:latin typeface="Nunito Sans"/>
+              </a:rPr>
+              <a:t>4. </a:t>
+            </a:r>
+            <a:r>
+              <a:rPr sz="2400" b="0">
+                <a:solidFill>
+                  <a:srgbClr val="1F2A44"/>
+                </a:solidFill>
+                <a:latin typeface="Nunito Sans"/>
+              </a:rPr>
+              <a:t>¿Es suficiente? Sola, no: también cuentan los reflejos y las ganas.</a:t>
+            </a:r>
+          </a:p>
+          <a:p>
+            <a:pPr>
+              <a:spcAft>
+                <a:spcPts val="1080"/>
+              </a:spcAft>
+            </a:pPr>
+            <a:r>
+              <a:rPr sz="2400" b="1">
+                <a:solidFill>
+                  <a:srgbClr val="E8793A"/>
+                </a:solidFill>
+                <a:latin typeface="Nunito Sans"/>
+              </a:rPr>
+              <a:t>5. </a:t>
+            </a:r>
+            <a:r>
+              <a:rPr sz="2400" b="0">
+                <a:solidFill>
+                  <a:srgbClr val="1F2A44"/>
+                </a:solidFill>
+                <a:latin typeface="Nunito Sans"/>
+              </a:rPr>
+              <a:t>Conclusión: si una razón viene a cuento depende de la conclusión. No la juzgues por su forma.</a:t>
+            </a:r>
+          </a:p>
+        </p:txBody>
+      </p:sp>
+    </p:spTree>
+  </p:cSld>
+  <p:clrMapOvr>
+    <a:masterClrMapping/>
+  </p:clrMapOvr>
+</p:sld>
+</file>
+
+<file path=ppt/slides/slide14.xml><?xml version="1.0" encoding="utf-8"?>
 <p:sld xmlns:a="http://schemas.openxmlformats.org/drawingml/2006/main" xmlns:p="http://schemas.openxmlformats.org/presentationml/2006/main" xmlns:r="http://schemas.openxmlformats.org/officeDocument/2006/relationships">
   <p:cSld>
     <p:bg>
@@ -4646,7 +4811,7 @@
                 </a:solidFill>
                 <a:latin typeface="Fredoka"/>
               </a:rPr>
-              <a:t>Deformar o resumir</a:t>
+              <a:t>Parecen razones y no lo son</a:t>
             </a:r>
           </a:p>
         </p:txBody>
@@ -4659,7 +4824,7 @@
 </p:sld>
 </file>
 
-<file path=ppt/slides/slide14.xml><?xml version="1.0" encoding="utf-8"?>
+<file path=ppt/slides/slide15.xml><?xml version="1.0" encoding="utf-8"?>
 <p:sld xmlns:a="http://schemas.openxmlformats.org/drawingml/2006/main" xmlns:p="http://schemas.openxmlformats.org/presentationml/2006/main" xmlns:r="http://schemas.openxmlformats.org/officeDocument/2006/relationships">
   <p:cSld>
     <p:bg>
@@ -4711,7 +4876,7 @@
                 </a:solidFill>
                 <a:latin typeface="Nunito Sans"/>
               </a:rPr>
-              <a:t>BLOQUE 3 · DEFORMAR O RESUMIR</a:t>
+              <a:t>BLOQUE 3 · PARECEN RAZONES Y NO LO SON</a:t>
             </a:r>
           </a:p>
         </p:txBody>
@@ -4750,723 +4915,378 @@
                 </a:solidFill>
                 <a:latin typeface="Fredoka"/>
               </a:rPr>
-              <a:t>¿Muñeco de paja o resumen justo?</a:t>
-            </a:r>
-          </a:p>
-        </p:txBody>
-      </p:sp>
-      <p:sp>
-        <p:nvSpPr>
-          <p:cNvPr id="4" name="Rectangle 3"/>
-          <p:cNvSpPr/>
+              <a:t>Llevan «porque», pero no son razones</a:t>
+            </a:r>
+          </a:p>
+        </p:txBody>
+      </p:sp>
+      <p:graphicFrame>
+        <p:nvGraphicFramePr>
+          <p:cNvPr id="4" name="Table 3"/>
+          <p:cNvGraphicFramePr>
+            <a:graphicFrameLocks noGrp="1"/>
+          </p:cNvGraphicFramePr>
           <p:nvPr/>
-        </p:nvSpPr>
-        <p:spPr>
-          <a:xfrm>
-            <a:off x="640000" y="1650000"/>
-            <a:ext cx="5306000" cy="4400000"/>
-          </a:xfrm>
-          <a:prstGeom prst="rect">
-            <a:avLst/>
-          </a:prstGeom>
-          <a:solidFill>
-            <a:srgbClr val="FBE3D2"/>
-          </a:solidFill>
-          <a:ln>
-            <a:noFill/>
-          </a:ln>
-        </p:spPr>
-        <p:style>
-          <a:lnRef idx="1">
-            <a:schemeClr val="accent1"/>
-          </a:lnRef>
-          <a:fillRef idx="3">
-            <a:schemeClr val="accent1"/>
-          </a:fillRef>
-          <a:effectRef idx="2">
-            <a:schemeClr val="accent1"/>
-          </a:effectRef>
-          <a:fontRef idx="minor">
-            <a:schemeClr val="lt1"/>
-          </a:fontRef>
-        </p:style>
-        <p:txBody>
-          <a:bodyPr rtlCol="0" anchor="ctr"/>
-          <a:lstStyle/>
-          <a:p>
-            <a:pPr algn="ctr"/>
-          </a:p>
-        </p:txBody>
-      </p:sp>
-      <p:sp>
-        <p:nvSpPr>
-          <p:cNvPr id="5" name="TextBox 4"/>
-          <p:cNvSpPr txBox="1"/>
-          <p:nvPr/>
-        </p:nvSpPr>
-        <p:spPr>
-          <a:xfrm>
-            <a:off x="840000" y="1750000"/>
-            <a:ext cx="4906000" cy="600000"/>
-          </a:xfrm>
-          <a:prstGeom prst="rect">
-            <a:avLst/>
-          </a:prstGeom>
-          <a:noFill/>
-        </p:spPr>
-        <p:txBody>
-          <a:bodyPr wrap="square">
-            <a:spAutoFit/>
-          </a:bodyPr>
-          <a:lstStyle/>
-          <a:p>
-            <a:pPr>
-              <a:spcAft>
-                <a:spcPts val="1260"/>
-              </a:spcAft>
-            </a:pPr>
-            <a:r>
-              <a:rPr sz="2800" b="1">
-                <a:solidFill>
-                  <a:srgbClr val="C2531C"/>
-                </a:solidFill>
-                <a:latin typeface="Nunito Sans"/>
-              </a:rPr>
-              <a:t>Hombre de paja</a:t>
-            </a:r>
-          </a:p>
-        </p:txBody>
-      </p:sp>
-      <p:sp>
-        <p:nvSpPr>
-          <p:cNvPr id="6" name="TextBox 5"/>
-          <p:cNvSpPr txBox="1"/>
-          <p:nvPr/>
-        </p:nvSpPr>
-        <p:spPr>
-          <a:xfrm>
-            <a:off x="840000" y="2400000"/>
-            <a:ext cx="4906000" cy="3500000"/>
-          </a:xfrm>
-          <a:prstGeom prst="rect">
-            <a:avLst/>
-          </a:prstGeom>
-          <a:noFill/>
-        </p:spPr>
-        <p:txBody>
-          <a:bodyPr wrap="square">
-            <a:spAutoFit/>
-          </a:bodyPr>
-          <a:lstStyle/>
-          <a:p>
-            <a:pPr>
-              <a:spcAft>
-                <a:spcPts val="1170"/>
-              </a:spcAft>
-            </a:pPr>
-            <a:r>
-              <a:rPr sz="2600" b="1">
-                <a:solidFill>
-                  <a:srgbClr val="E8793A"/>
-                </a:solidFill>
-                <a:latin typeface="Nunito Sans"/>
-              </a:rPr>
-              <a:t>• </a:t>
-            </a:r>
-            <a:r>
-              <a:rPr sz="2600" b="0">
-                <a:solidFill>
-                  <a:srgbClr val="1F2A44"/>
-                </a:solidFill>
-                <a:latin typeface="Nunito Sans"/>
-              </a:rPr>
-              <a:t>Exagera o cambia la idea</a:t>
-            </a:r>
-          </a:p>
-          <a:p>
-            <a:pPr>
-              <a:spcAft>
-                <a:spcPts val="1170"/>
-              </a:spcAft>
-            </a:pPr>
-            <a:r>
-              <a:rPr sz="2600" b="1">
-                <a:solidFill>
-                  <a:srgbClr val="E8793A"/>
-                </a:solidFill>
-                <a:latin typeface="Nunito Sans"/>
-              </a:rPr>
-              <a:t>• </a:t>
-            </a:r>
-            <a:r>
-              <a:rPr sz="2600" b="0">
-                <a:solidFill>
-                  <a:srgbClr val="1F2A44"/>
-                </a:solidFill>
-                <a:latin typeface="Nunito Sans"/>
-              </a:rPr>
-              <a:t>Ataca algo que no se ha dicho</a:t>
-            </a:r>
-          </a:p>
-          <a:p>
-            <a:pPr>
-              <a:spcAft>
-                <a:spcPts val="1170"/>
-              </a:spcAft>
-            </a:pPr>
-            <a:r>
-              <a:rPr sz="2600" b="1">
-                <a:solidFill>
-                  <a:srgbClr val="E8793A"/>
-                </a:solidFill>
-                <a:latin typeface="Nunito Sans"/>
-              </a:rPr>
-              <a:t>• </a:t>
-            </a:r>
-            <a:r>
-              <a:rPr sz="2600" b="0">
-                <a:solidFill>
-                  <a:srgbClr val="1F2A44"/>
-                </a:solidFill>
-                <a:latin typeface="Nunito Sans"/>
-              </a:rPr>
-              <a:t>Busca ganar fácil</a:t>
-            </a:r>
-          </a:p>
-        </p:txBody>
-      </p:sp>
-      <p:sp>
-        <p:nvSpPr>
-          <p:cNvPr id="7" name="Rectangle 6"/>
-          <p:cNvSpPr/>
-          <p:nvPr/>
-        </p:nvSpPr>
-        <p:spPr>
-          <a:xfrm>
-            <a:off x="6246000" y="1650000"/>
-            <a:ext cx="5306000" cy="4400000"/>
-          </a:xfrm>
-          <a:prstGeom prst="rect">
-            <a:avLst/>
-          </a:prstGeom>
-          <a:solidFill>
-            <a:srgbClr val="EAF0F7"/>
-          </a:solidFill>
-          <a:ln>
-            <a:noFill/>
-          </a:ln>
-        </p:spPr>
-        <p:style>
-          <a:lnRef idx="1">
-            <a:schemeClr val="accent1"/>
-          </a:lnRef>
-          <a:fillRef idx="3">
-            <a:schemeClr val="accent1"/>
-          </a:fillRef>
-          <a:effectRef idx="2">
-            <a:schemeClr val="accent1"/>
-          </a:effectRef>
-          <a:fontRef idx="minor">
-            <a:schemeClr val="lt1"/>
-          </a:fontRef>
-        </p:style>
-        <p:txBody>
-          <a:bodyPr rtlCol="0" anchor="ctr"/>
-          <a:lstStyle/>
-          <a:p>
-            <a:pPr algn="ctr"/>
-          </a:p>
-        </p:txBody>
-      </p:sp>
-      <p:sp>
-        <p:nvSpPr>
-          <p:cNvPr id="8" name="TextBox 7"/>
-          <p:cNvSpPr txBox="1"/>
-          <p:nvPr/>
-        </p:nvSpPr>
-        <p:spPr>
-          <a:xfrm>
-            <a:off x="6446000" y="1750000"/>
-            <a:ext cx="4906000" cy="600000"/>
-          </a:xfrm>
-          <a:prstGeom prst="rect">
-            <a:avLst/>
-          </a:prstGeom>
-          <a:noFill/>
-        </p:spPr>
-        <p:txBody>
-          <a:bodyPr wrap="square">
-            <a:spAutoFit/>
-          </a:bodyPr>
-          <a:lstStyle/>
-          <a:p>
-            <a:pPr>
-              <a:spcAft>
-                <a:spcPts val="1260"/>
-              </a:spcAft>
-            </a:pPr>
-            <a:r>
-              <a:rPr sz="2800" b="1">
-                <a:solidFill>
-                  <a:srgbClr val="2F6FB5"/>
-                </a:solidFill>
-                <a:latin typeface="Nunito Sans"/>
-              </a:rPr>
-              <a:t>Resumen justo</a:t>
-            </a:r>
-          </a:p>
-        </p:txBody>
-      </p:sp>
-      <p:sp>
-        <p:nvSpPr>
-          <p:cNvPr id="9" name="TextBox 8"/>
-          <p:cNvSpPr txBox="1"/>
-          <p:nvPr/>
-        </p:nvSpPr>
-        <p:spPr>
-          <a:xfrm>
-            <a:off x="6446000" y="2400000"/>
-            <a:ext cx="4906000" cy="3500000"/>
-          </a:xfrm>
-          <a:prstGeom prst="rect">
-            <a:avLst/>
-          </a:prstGeom>
-          <a:noFill/>
-        </p:spPr>
-        <p:txBody>
-          <a:bodyPr wrap="square">
-            <a:spAutoFit/>
-          </a:bodyPr>
-          <a:lstStyle/>
-          <a:p>
-            <a:pPr>
-              <a:spcAft>
-                <a:spcPts val="1170"/>
-              </a:spcAft>
-            </a:pPr>
-            <a:r>
-              <a:rPr sz="2600" b="1">
-                <a:solidFill>
-                  <a:srgbClr val="E8793A"/>
-                </a:solidFill>
-                <a:latin typeface="Nunito Sans"/>
-              </a:rPr>
-              <a:t>• </a:t>
-            </a:r>
-            <a:r>
-              <a:rPr sz="2600" b="0">
-                <a:solidFill>
-                  <a:srgbClr val="1F2A44"/>
-                </a:solidFill>
-                <a:latin typeface="Nunito Sans"/>
-              </a:rPr>
-              <a:t>Repite la idea como la dijo el otro</a:t>
-            </a:r>
-          </a:p>
-          <a:p>
-            <a:pPr>
-              <a:spcAft>
-                <a:spcPts val="1170"/>
-              </a:spcAft>
-            </a:pPr>
-            <a:r>
-              <a:rPr sz="2600" b="1">
-                <a:solidFill>
-                  <a:srgbClr val="E8793A"/>
-                </a:solidFill>
-                <a:latin typeface="Nunito Sans"/>
-              </a:rPr>
-              <a:t>• </a:t>
-            </a:r>
-            <a:r>
-              <a:rPr sz="2600" b="0">
-                <a:solidFill>
-                  <a:srgbClr val="1F2A44"/>
-                </a:solidFill>
-                <a:latin typeface="Nunito Sans"/>
-              </a:rPr>
-              <a:t>El otro diría: «sí, eso digo»</a:t>
-            </a:r>
-          </a:p>
-          <a:p>
-            <a:pPr>
-              <a:spcAft>
-                <a:spcPts val="1170"/>
-              </a:spcAft>
-            </a:pPr>
-            <a:r>
-              <a:rPr sz="2600" b="1">
-                <a:solidFill>
-                  <a:srgbClr val="E8793A"/>
-                </a:solidFill>
-                <a:latin typeface="Nunito Sans"/>
-              </a:rPr>
-              <a:t>• </a:t>
-            </a:r>
-            <a:r>
-              <a:rPr sz="2600" b="0">
-                <a:solidFill>
-                  <a:srgbClr val="1F2A44"/>
-                </a:solidFill>
-                <a:latin typeface="Nunito Sans"/>
-              </a:rPr>
-              <a:t>Responde a la idea real</a:t>
-            </a:r>
-          </a:p>
-        </p:txBody>
-      </p:sp>
-    </p:spTree>
-  </p:cSld>
-  <p:clrMapOvr>
-    <a:masterClrMapping/>
-  </p:clrMapOvr>
-</p:sld>
-</file>
-
-<file path=ppt/slides/slide15.xml><?xml version="1.0" encoding="utf-8"?>
-<p:sld xmlns:a="http://schemas.openxmlformats.org/drawingml/2006/main" xmlns:p="http://schemas.openxmlformats.org/presentationml/2006/main" xmlns:r="http://schemas.openxmlformats.org/officeDocument/2006/relationships">
-  <p:cSld>
-    <p:bg>
-      <p:bgPr>
-        <a:solidFill>
-          <a:srgbClr val="F6C9A8"/>
-        </a:solidFill>
-        <a:effectLst/>
-      </p:bgPr>
-    </p:bg>
-    <p:spTree>
-      <p:nvGrpSpPr>
-        <p:cNvPr id="1" name=""/>
-        <p:cNvGrpSpPr/>
-        <p:nvPr/>
-      </p:nvGrpSpPr>
-      <p:grpSpPr/>
-      <p:sp>
-        <p:nvSpPr>
-          <p:cNvPr id="2" name="TextBox 1"/>
-          <p:cNvSpPr txBox="1"/>
-          <p:nvPr/>
-        </p:nvSpPr>
-        <p:spPr>
-          <a:xfrm>
-            <a:off x="640000" y="380000"/>
-            <a:ext cx="10912000" cy="420000"/>
-          </a:xfrm>
-          <a:prstGeom prst="rect">
-            <a:avLst/>
-          </a:prstGeom>
-          <a:noFill/>
-        </p:spPr>
-        <p:txBody>
-          <a:bodyPr wrap="square">
-            <a:spAutoFit/>
-          </a:bodyPr>
-          <a:lstStyle/>
-          <a:p>
-            <a:pPr>
-              <a:spcAft>
-                <a:spcPts val="630"/>
-              </a:spcAft>
-            </a:pPr>
-            <a:r>
-              <a:rPr sz="1400" b="1">
-                <a:solidFill>
-                  <a:srgbClr val="1F2A44"/>
-                </a:solidFill>
-                <a:latin typeface="Nunito Sans"/>
-              </a:rPr>
-              <a:t>CASO TRAMPA · BLOQUE 3 · DEFORMAR O RESUMIR</a:t>
-            </a:r>
-          </a:p>
-        </p:txBody>
-      </p:sp>
-      <p:sp>
-        <p:nvSpPr>
-          <p:cNvPr id="3" name="TextBox 2"/>
-          <p:cNvSpPr txBox="1"/>
-          <p:nvPr/>
-        </p:nvSpPr>
-        <p:spPr>
-          <a:xfrm>
-            <a:off x="640000" y="760000"/>
-            <a:ext cx="10912000" cy="800000"/>
-          </a:xfrm>
-          <a:prstGeom prst="rect">
-            <a:avLst/>
-          </a:prstGeom>
-          <a:noFill/>
-        </p:spPr>
-        <p:txBody>
-          <a:bodyPr wrap="square">
-            <a:spAutoFit/>
-          </a:bodyPr>
-          <a:lstStyle/>
-          <a:p>
-            <a:pPr>
-              <a:spcAft>
-                <a:spcPts val="1710"/>
-              </a:spcAft>
-            </a:pPr>
-            <a:r>
-              <a:rPr sz="3800" b="1">
-                <a:solidFill>
-                  <a:srgbClr val="1F2A44"/>
-                </a:solidFill>
-                <a:latin typeface="Fredoka"/>
-              </a:rPr>
-              <a:t>⚠ ¿Suena exagerado = hombre de paja?</a:t>
-            </a:r>
-          </a:p>
-        </p:txBody>
-      </p:sp>
-      <p:sp>
-        <p:nvSpPr>
-          <p:cNvPr id="4" name="Rectangle 3"/>
-          <p:cNvSpPr/>
-          <p:nvPr/>
-        </p:nvSpPr>
-        <p:spPr>
-          <a:xfrm>
-            <a:off x="640000" y="1600000"/>
-            <a:ext cx="10912000" cy="1100000"/>
-          </a:xfrm>
-          <a:prstGeom prst="rect">
-            <a:avLst/>
-          </a:prstGeom>
-          <a:solidFill>
-            <a:srgbClr val="FBF7EF"/>
-          </a:solidFill>
-          <a:ln>
-            <a:noFill/>
-          </a:ln>
-        </p:spPr>
-        <p:style>
-          <a:lnRef idx="1">
-            <a:schemeClr val="accent1"/>
-          </a:lnRef>
-          <a:fillRef idx="3">
-            <a:schemeClr val="accent1"/>
-          </a:fillRef>
-          <a:effectRef idx="2">
-            <a:schemeClr val="accent1"/>
-          </a:effectRef>
-          <a:fontRef idx="minor">
-            <a:schemeClr val="lt1"/>
-          </a:fontRef>
-        </p:style>
-        <p:txBody>
-          <a:bodyPr rtlCol="0" anchor="ctr"/>
-          <a:lstStyle/>
-          <a:p>
-            <a:pPr algn="ctr"/>
-          </a:p>
-        </p:txBody>
-      </p:sp>
-      <p:sp>
-        <p:nvSpPr>
-          <p:cNvPr id="5" name="TextBox 4"/>
-          <p:cNvSpPr txBox="1"/>
-          <p:nvPr/>
-        </p:nvSpPr>
-        <p:spPr>
-          <a:xfrm>
-            <a:off x="840000" y="1650000"/>
-            <a:ext cx="10512000" cy="1000000"/>
-          </a:xfrm>
-          <a:prstGeom prst="rect">
-            <a:avLst/>
-          </a:prstGeom>
-          <a:noFill/>
-        </p:spPr>
-        <p:txBody>
-          <a:bodyPr wrap="square" anchor="ctr">
-            <a:spAutoFit/>
-          </a:bodyPr>
-          <a:lstStyle/>
-          <a:p>
-            <a:pPr>
-              <a:spcAft>
-                <a:spcPts val="1170"/>
-              </a:spcAft>
-            </a:pPr>
-            <a:r>
-              <a:rPr sz="2600" b="1">
-                <a:solidFill>
-                  <a:srgbClr val="1F2A44"/>
-                </a:solidFill>
-                <a:latin typeface="Nunito Sans"/>
-              </a:rPr>
-              <a:t>Un chico: «Los deberes no sirven para nada: hay que quitarlos todos». Una chica: «Este chico quiere quitar todos los deberes, y no estoy de acuerdo».</a:t>
-            </a:r>
-          </a:p>
-        </p:txBody>
-      </p:sp>
-      <p:sp>
-        <p:nvSpPr>
-          <p:cNvPr id="6" name="TextBox 5"/>
-          <p:cNvSpPr txBox="1"/>
-          <p:nvPr/>
-        </p:nvSpPr>
-        <p:spPr>
-          <a:xfrm>
-            <a:off x="640000" y="2900000"/>
-            <a:ext cx="10912000" cy="3500000"/>
-          </a:xfrm>
-          <a:prstGeom prst="rect">
-            <a:avLst/>
-          </a:prstGeom>
-          <a:noFill/>
-        </p:spPr>
-        <p:txBody>
-          <a:bodyPr wrap="square">
-            <a:spAutoFit/>
-          </a:bodyPr>
-          <a:lstStyle/>
-          <a:p>
-            <a:pPr>
-              <a:spcAft>
-                <a:spcPts val="1080"/>
-              </a:spcAft>
-            </a:pPr>
-            <a:r>
-              <a:rPr sz="2400" b="1">
-                <a:solidFill>
-                  <a:srgbClr val="E8793A"/>
-                </a:solidFill>
-                <a:latin typeface="Nunito Sans"/>
-              </a:rPr>
-              <a:t>1. </a:t>
-            </a:r>
-            <a:r>
-              <a:rPr sz="2400" b="0">
-                <a:solidFill>
-                  <a:srgbClr val="1F2A44"/>
-                </a:solidFill>
-                <a:latin typeface="Nunito Sans"/>
-              </a:rPr>
-              <a:t>Suena muy exagerado. ¿Es un hombre de paja?</a:t>
-            </a:r>
-          </a:p>
-          <a:p>
-            <a:pPr>
-              <a:spcAft>
-                <a:spcPts val="1080"/>
-              </a:spcAft>
-            </a:pPr>
-            <a:r>
-              <a:rPr sz="2400" b="1">
-                <a:solidFill>
-                  <a:srgbClr val="E8793A"/>
-                </a:solidFill>
-                <a:latin typeface="Nunito Sans"/>
-              </a:rPr>
-              <a:t>2. </a:t>
-            </a:r>
-            <a:r>
-              <a:rPr sz="2400" b="0">
-                <a:solidFill>
-                  <a:srgbClr val="1F2A44"/>
-                </a:solidFill>
-                <a:latin typeface="Nunito Sans"/>
-              </a:rPr>
-              <a:t>Suena extremo, como los muñecos de paja que hemos visto.</a:t>
-            </a:r>
-          </a:p>
-          <a:p>
-            <a:pPr>
-              <a:spcAft>
-                <a:spcPts val="1080"/>
-              </a:spcAft>
-            </a:pPr>
-            <a:r>
-              <a:rPr sz="2400" b="1">
-                <a:solidFill>
-                  <a:srgbClr val="E8793A"/>
-                </a:solidFill>
-                <a:latin typeface="Nunito Sans"/>
-              </a:rPr>
-              <a:t>3. </a:t>
-            </a:r>
-            <a:r>
-              <a:rPr sz="2400" b="0">
-                <a:solidFill>
-                  <a:srgbClr val="1F2A44"/>
-                </a:solidFill>
-                <a:latin typeface="Nunito Sans"/>
-              </a:rPr>
-              <a:t>Pero ¿lo dijo el chico? Sí: «hay que quitarlos todos».</a:t>
-            </a:r>
-          </a:p>
-          <a:p>
-            <a:pPr>
-              <a:spcAft>
-                <a:spcPts val="1080"/>
-              </a:spcAft>
-            </a:pPr>
-            <a:r>
-              <a:rPr sz="2400" b="1">
-                <a:solidFill>
-                  <a:srgbClr val="E8793A"/>
-                </a:solidFill>
-                <a:latin typeface="Nunito Sans"/>
-              </a:rPr>
-              <a:t>4. </a:t>
-            </a:r>
-            <a:r>
-              <a:rPr sz="2400" b="0">
-                <a:solidFill>
-                  <a:srgbClr val="1F2A44"/>
-                </a:solidFill>
-                <a:latin typeface="Nunito Sans"/>
-              </a:rPr>
-              <a:t>El chico diría: «sí, eso digo». Es un </a:t>
-            </a:r>
-            <a:r>
-              <a:rPr sz="2400" b="1">
-                <a:solidFill>
-                  <a:srgbClr val="1F2A44"/>
-                </a:solidFill>
-                <a:latin typeface="Nunito Sans"/>
-              </a:rPr>
-              <a:t>resumen justo</a:t>
-            </a:r>
-            <a:r>
-              <a:rPr sz="2400" b="0">
-                <a:solidFill>
-                  <a:srgbClr val="1F2A44"/>
-                </a:solidFill>
-                <a:latin typeface="Nunito Sans"/>
-              </a:rPr>
-              <a:t> de una idea que ya era extrema.</a:t>
-            </a:r>
-          </a:p>
-          <a:p>
-            <a:pPr>
-              <a:spcAft>
-                <a:spcPts val="1080"/>
-              </a:spcAft>
-            </a:pPr>
-            <a:r>
-              <a:rPr sz="2400" b="1">
-                <a:solidFill>
-                  <a:srgbClr val="E8793A"/>
-                </a:solidFill>
-                <a:latin typeface="Nunito Sans"/>
-              </a:rPr>
-              <a:t>5. </a:t>
-            </a:r>
-            <a:r>
-              <a:rPr sz="2400" b="0">
-                <a:solidFill>
-                  <a:srgbClr val="1F2A44"/>
-                </a:solidFill>
-                <a:latin typeface="Nunito Sans"/>
-              </a:rPr>
-              <a:t>Conclusión: compara con lo que dijo de verdad, no con lo exagerado que suena.</a:t>
-            </a:r>
-          </a:p>
-        </p:txBody>
-      </p:sp>
+        </p:nvGraphicFramePr>
+        <p:xfrm>
+          <a:off x="640000" y="1700000"/>
+          <a:ext cx="10912000" cy="3000000"/>
+        </p:xfrm>
+        <a:graphic>
+          <a:graphicData uri="http://schemas.openxmlformats.org/drawingml/2006/table">
+            <a:tbl>
+              <a:tblPr firstRow="1" bandRow="1">
+                <a:tableStyleId>{5C22544A-7EE6-4342-B048-85BDC9FD1C3A}</a:tableStyleId>
+              </a:tblPr>
+              <a:tblGrid>
+                <a:gridCol w="3637333"/>
+                <a:gridCol w="3637333"/>
+                <a:gridCol w="3637334"/>
+              </a:tblGrid>
+              <a:tr h="600000">
+                <a:tc>
+                  <a:txBody>
+                    <a:bodyPr/>
+                    <a:lstStyle/>
+                    <a:p>
+                      <a:r>
+                        <a:rPr sz="2000" b="1">
+                          <a:solidFill>
+                            <a:srgbClr val="FBF7EF"/>
+                          </a:solidFill>
+                          <a:latin typeface="Fredoka"/>
+                        </a:rPr>
+                        <a:t>Tipo</a:t>
+                      </a:r>
+                    </a:p>
+                  </a:txBody>
+                  <a:tcPr>
+                    <a:solidFill>
+                      <a:srgbClr val="1F2A44"/>
+                    </a:solidFill>
+                  </a:tcPr>
+                </a:tc>
+                <a:tc>
+                  <a:txBody>
+                    <a:bodyPr/>
+                    <a:lstStyle/>
+                    <a:p>
+                      <a:r>
+                        <a:rPr sz="2000" b="1">
+                          <a:solidFill>
+                            <a:srgbClr val="FBF7EF"/>
+                          </a:solidFill>
+                          <a:latin typeface="Fredoka"/>
+                        </a:rPr>
+                        <a:t>Ejemplo</a:t>
+                      </a:r>
+                    </a:p>
+                  </a:txBody>
+                  <a:tcPr>
+                    <a:solidFill>
+                      <a:srgbClr val="1F2A44"/>
+                    </a:solidFill>
+                  </a:tcPr>
+                </a:tc>
+                <a:tc>
+                  <a:txBody>
+                    <a:bodyPr/>
+                    <a:lstStyle/>
+                    <a:p>
+                      <a:r>
+                        <a:rPr sz="2000" b="1">
+                          <a:solidFill>
+                            <a:srgbClr val="FBF7EF"/>
+                          </a:solidFill>
+                          <a:latin typeface="Fredoka"/>
+                        </a:rPr>
+                        <a:t>Por qué no es una razón</a:t>
+                      </a:r>
+                    </a:p>
+                  </a:txBody>
+                  <a:tcPr>
+                    <a:solidFill>
+                      <a:srgbClr val="1F2A44"/>
+                    </a:solidFill>
+                  </a:tcPr>
+                </a:tc>
+              </a:tr>
+              <a:tr h="600000">
+                <a:tc>
+                  <a:txBody>
+                    <a:bodyPr/>
+                    <a:lstStyle/>
+                    <a:p>
+                      <a:r>
+                        <a:rPr sz="2000" b="1">
+                          <a:solidFill>
+                            <a:srgbClr val="1F2A44"/>
+                          </a:solidFill>
+                          <a:latin typeface="Nunito Sans"/>
+                        </a:rPr>
+                        <a:t>Repetir</a:t>
+                      </a:r>
+                    </a:p>
+                  </a:txBody>
+                  <a:tcPr>
+                    <a:solidFill>
+                      <a:srgbClr val="FFFFFF"/>
+                    </a:solidFill>
+                  </a:tcPr>
+                </a:tc>
+                <a:tc>
+                  <a:txBody>
+                    <a:bodyPr/>
+                    <a:lstStyle/>
+                    <a:p>
+                      <a:r>
+                        <a:rPr sz="2000" b="0">
+                          <a:solidFill>
+                            <a:srgbClr val="1F2A44"/>
+                          </a:solidFill>
+                          <a:latin typeface="Nunito Sans"/>
+                        </a:rPr>
+                        <a:t>«Esta serie es la mejor porque es la mejor»</a:t>
+                      </a:r>
+                    </a:p>
+                  </a:txBody>
+                  <a:tcPr>
+                    <a:solidFill>
+                      <a:srgbClr val="FFFFFF"/>
+                    </a:solidFill>
+                  </a:tcPr>
+                </a:tc>
+                <a:tc>
+                  <a:txBody>
+                    <a:bodyPr/>
+                    <a:lstStyle/>
+                    <a:p>
+                      <a:r>
+                        <a:rPr sz="2000" b="0">
+                          <a:solidFill>
+                            <a:srgbClr val="1F2A44"/>
+                          </a:solidFill>
+                          <a:latin typeface="Nunito Sans"/>
+                        </a:rPr>
+                        <a:t>Dice lo mismo dos veces</a:t>
+                      </a:r>
+                    </a:p>
+                  </a:txBody>
+                  <a:tcPr>
+                    <a:solidFill>
+                      <a:srgbClr val="FFFFFF"/>
+                    </a:solidFill>
+                  </a:tcPr>
+                </a:tc>
+              </a:tr>
+              <a:tr h="600000">
+                <a:tc>
+                  <a:txBody>
+                    <a:bodyPr/>
+                    <a:lstStyle/>
+                    <a:p>
+                      <a:r>
+                        <a:rPr sz="2000" b="1">
+                          <a:solidFill>
+                            <a:srgbClr val="1F2A44"/>
+                          </a:solidFill>
+                          <a:latin typeface="Nunito Sans"/>
+                        </a:rPr>
+                        <a:t>Un gusto</a:t>
+                      </a:r>
+                    </a:p>
+                  </a:txBody>
+                  <a:tcPr>
+                    <a:solidFill>
+                      <a:srgbClr val="EAF0F7"/>
+                    </a:solidFill>
+                  </a:tcPr>
+                </a:tc>
+                <a:tc>
+                  <a:txBody>
+                    <a:bodyPr/>
+                    <a:lstStyle/>
+                    <a:p>
+                      <a:r>
+                        <a:rPr sz="2000" b="0">
+                          <a:solidFill>
+                            <a:srgbClr val="1F2A44"/>
+                          </a:solidFill>
+                          <a:latin typeface="Nunito Sans"/>
+                        </a:rPr>
+                        <a:t>«El reguetón es la mejor música, porque me encanta»</a:t>
+                      </a:r>
+                    </a:p>
+                  </a:txBody>
+                  <a:tcPr>
+                    <a:solidFill>
+                      <a:srgbClr val="EAF0F7"/>
+                    </a:solidFill>
+                  </a:tcPr>
+                </a:tc>
+                <a:tc>
+                  <a:txBody>
+                    <a:bodyPr/>
+                    <a:lstStyle/>
+                    <a:p>
+                      <a:r>
+                        <a:rPr sz="2000" b="0">
+                          <a:solidFill>
+                            <a:srgbClr val="1F2A44"/>
+                          </a:solidFill>
+                          <a:latin typeface="Nunito Sans"/>
+                        </a:rPr>
+                        <a:t>Habla de mí, no de todos</a:t>
+                      </a:r>
+                    </a:p>
+                  </a:txBody>
+                  <a:tcPr>
+                    <a:solidFill>
+                      <a:srgbClr val="EAF0F7"/>
+                    </a:solidFill>
+                  </a:tcPr>
+                </a:tc>
+              </a:tr>
+              <a:tr h="600000">
+                <a:tc>
+                  <a:txBody>
+                    <a:bodyPr/>
+                    <a:lstStyle/>
+                    <a:p>
+                      <a:r>
+                        <a:rPr sz="2000" b="1">
+                          <a:solidFill>
+                            <a:srgbClr val="1F2A44"/>
+                          </a:solidFill>
+                          <a:latin typeface="Nunito Sans"/>
+                        </a:rPr>
+                        <a:t>Una amenaza</a:t>
+                      </a:r>
+                    </a:p>
+                  </a:txBody>
+                  <a:tcPr>
+                    <a:solidFill>
+                      <a:srgbClr val="FFFFFF"/>
+                    </a:solidFill>
+                  </a:tcPr>
+                </a:tc>
+                <a:tc>
+                  <a:txBody>
+                    <a:bodyPr/>
+                    <a:lstStyle/>
+                    <a:p>
+                      <a:r>
+                        <a:rPr sz="2000" b="0">
+                          <a:solidFill>
+                            <a:srgbClr val="1F2A44"/>
+                          </a:solidFill>
+                          <a:latin typeface="Nunito Sans"/>
+                        </a:rPr>
+                        <a:t>«Vótame de delegado o no te paso los apuntes»</a:t>
+                      </a:r>
+                    </a:p>
+                  </a:txBody>
+                  <a:tcPr>
+                    <a:solidFill>
+                      <a:srgbClr val="FFFFFF"/>
+                    </a:solidFill>
+                  </a:tcPr>
+                </a:tc>
+                <a:tc>
+                  <a:txBody>
+                    <a:bodyPr/>
+                    <a:lstStyle/>
+                    <a:p>
+                      <a:r>
+                        <a:rPr sz="2000" b="0">
+                          <a:solidFill>
+                            <a:srgbClr val="1F2A44"/>
+                          </a:solidFill>
+                          <a:latin typeface="Nunito Sans"/>
+                        </a:rPr>
+                        <a:t>Solo mete miedo</a:t>
+                      </a:r>
+                    </a:p>
+                  </a:txBody>
+                  <a:tcPr>
+                    <a:solidFill>
+                      <a:srgbClr val="FFFFFF"/>
+                    </a:solidFill>
+                  </a:tcPr>
+                </a:tc>
+              </a:tr>
+              <a:tr h="600000">
+                <a:tc>
+                  <a:txBody>
+                    <a:bodyPr/>
+                    <a:lstStyle/>
+                    <a:p>
+                      <a:r>
+                        <a:rPr sz="2000" b="1">
+                          <a:solidFill>
+                            <a:srgbClr val="1F2A44"/>
+                          </a:solidFill>
+                          <a:latin typeface="Nunito Sans"/>
+                        </a:rPr>
+                        <a:t>Un insulto</a:t>
+                      </a:r>
+                    </a:p>
+                  </a:txBody>
+                  <a:tcPr>
+                    <a:solidFill>
+                      <a:srgbClr val="EAF0F7"/>
+                    </a:solidFill>
+                  </a:tcPr>
+                </a:tc>
+                <a:tc>
+                  <a:txBody>
+                    <a:bodyPr/>
+                    <a:lstStyle/>
+                    <a:p>
+                      <a:r>
+                        <a:rPr sz="2000" b="0">
+                          <a:solidFill>
+                            <a:srgbClr val="1F2A44"/>
+                          </a:solidFill>
+                          <a:latin typeface="Nunito Sans"/>
+                        </a:rPr>
+                        <a:t>«Eso es una tontería, porque eres un pringado»</a:t>
+                      </a:r>
+                    </a:p>
+                  </a:txBody>
+                  <a:tcPr>
+                    <a:solidFill>
+                      <a:srgbClr val="EAF0F7"/>
+                    </a:solidFill>
+                  </a:tcPr>
+                </a:tc>
+                <a:tc>
+                  <a:txBody>
+                    <a:bodyPr/>
+                    <a:lstStyle/>
+                    <a:p>
+                      <a:r>
+                        <a:rPr sz="2000" b="0">
+                          <a:solidFill>
+                            <a:srgbClr val="1F2A44"/>
+                          </a:solidFill>
+                          <a:latin typeface="Nunito Sans"/>
+                        </a:rPr>
+                        <a:t>Ataca a quien habla, no a lo que dice</a:t>
+                      </a:r>
+                    </a:p>
+                  </a:txBody>
+                  <a:tcPr>
+                    <a:solidFill>
+                      <a:srgbClr val="EAF0F7"/>
+                    </a:solidFill>
+                  </a:tcPr>
+                </a:tc>
+              </a:tr>
+            </a:tbl>
+          </a:graphicData>
+        </a:graphic>
+      </p:graphicFrame>
     </p:spTree>
   </p:cSld>
   <p:clrMapOvr>
@@ -5718,7 +5538,7 @@
                 </a:solidFill>
                 <a:latin typeface="Nunito Sans"/>
               </a:rPr>
-              <a:t>El hombre de paja deforma la idea del otro para atacarla más fácil.</a:t>
+              <a:t>Una buena razón pasa tres preguntas: ¿es verdad?, ¿viene a cuento?, ¿es suficiente?</a:t>
             </a:r>
           </a:p>
           <a:p>
@@ -5743,7 +5563,7 @@
                 </a:solidFill>
                 <a:latin typeface="Nunito Sans"/>
               </a:rPr>
-              <a:t>Se fabrica exagerando, recortando o inventando lo que el otro dijo.</a:t>
+              <a:t>Si falla una de las tres, la razón no sirve para esa conclusión.</a:t>
             </a:r>
           </a:p>
           <a:p>
@@ -5768,7 +5588,7 @@
                 </a:solidFill>
                 <a:latin typeface="Nunito Sans"/>
               </a:rPr>
-              <a:t>Para desmontarlo, pregunta: ¿es eso exactamente lo que he dicho?</a:t>
+              <a:t>Repetir, un gusto, una amenaza o un insulto no son razones, aunque lleven «porque».</a:t>
             </a:r>
           </a:p>
         </p:txBody>
@@ -5872,7 +5692,7 @@
                 </a:solidFill>
                 <a:latin typeface="Fredoka"/>
               </a:rPr>
-              <a:t>La falacia del hombre de paja</a:t>
+              <a:t>Monty Python, «La clínica de las discusiones», subtitulada en español</a:t>
             </a:r>
           </a:p>
         </p:txBody>
@@ -5911,7 +5731,7 @@
                 </a:solidFill>
                 <a:latin typeface="Nunito Sans"/>
               </a:rPr>
-              <a:t>Ver el truco en discusiones y en dibujos animados.</a:t>
+              <a:t>Ver con humor que llevar la contraria no es dar razones. Revisarlo antes: es humor británico de los años 70.</a:t>
             </a:r>
           </a:p>
         </p:txBody>
@@ -6569,7 +6389,7 @@
                 </a:solidFill>
                 <a:latin typeface="Nunito Sans"/>
               </a:rPr>
-              <a:t>El ataque a la persona habla de quien lo dice, no de la ______.  (sesión 14)</a:t>
+              <a:t>Para reconstruir un argumento, el primer paso es buscar la ______.  (sesión 14)</a:t>
             </a:r>
           </a:p>
           <a:p>
@@ -6594,7 +6414,7 @@
                 </a:solidFill>
                 <a:latin typeface="Nunito Sans"/>
               </a:rPr>
-              <a:t>Que alguien no cumpla un consejo no lo hace ______.  (sesión 14)</a:t>
+              <a:t>La premisa oculta también se llama premisa ______.  (sesión 14)</a:t>
             </a:r>
           </a:p>
           <a:p>
@@ -6619,7 +6439,7 @@
                 </a:solidFill>
                 <a:latin typeface="Nunito Sans"/>
               </a:rPr>
-              <a:t>Si acierto por ______, no lo sé.  (sesión 3)</a:t>
+              <a:t>Creer algo porque me gusta creerlo o me da miedo es el camino de la ______.  (sesión 3)</a:t>
             </a:r>
           </a:p>
         </p:txBody>
@@ -6771,7 +6591,7 @@
                 </a:solidFill>
                 <a:latin typeface="Nunito Sans"/>
               </a:rPr>
-              <a:t>El ataque a la persona habla de quien lo dice, no de la </a:t>
+              <a:t>Para reconstruir un argumento, el primer paso es buscar la </a:t>
             </a:r>
             <a:r>
               <a:rPr sz="2600" b="1">
@@ -6780,7 +6600,7 @@
                 </a:solidFill>
                 <a:latin typeface="Nunito Sans"/>
               </a:rPr>
-              <a:t>idea</a:t>
+              <a:t>conclusión</a:t>
             </a:r>
             <a:r>
               <a:rPr sz="2600" b="0">
@@ -6814,7 +6634,7 @@
                 </a:solidFill>
                 <a:latin typeface="Nunito Sans"/>
               </a:rPr>
-              <a:t>Que alguien no cumpla un consejo no lo hace </a:t>
+              <a:t>La premisa oculta también se llama premisa </a:t>
             </a:r>
             <a:r>
               <a:rPr sz="2600" b="1">
@@ -6823,7 +6643,7 @@
                 </a:solidFill>
                 <a:latin typeface="Nunito Sans"/>
               </a:rPr>
-              <a:t>falso</a:t>
+              <a:t>implícita</a:t>
             </a:r>
             <a:r>
               <a:rPr sz="2600" b="0">
@@ -6857,7 +6677,7 @@
                 </a:solidFill>
                 <a:latin typeface="Nunito Sans"/>
               </a:rPr>
-              <a:t>Si acierto por </a:t>
+              <a:t>Creer algo porque me gusta creerlo o me da miedo es el camino de la </a:t>
             </a:r>
             <a:r>
               <a:rPr sz="2600" b="1">
@@ -6866,7 +6686,7 @@
                 </a:solidFill>
                 <a:latin typeface="Nunito Sans"/>
               </a:rPr>
-              <a:t>suerte</a:t>
+              <a:t>emoción</a:t>
             </a:r>
             <a:r>
               <a:rPr sz="2600" b="0">
@@ -6875,7 +6695,7 @@
                 </a:solidFill>
                 <a:latin typeface="Nunito Sans"/>
               </a:rPr>
-              <a:t>, no lo sé.  (sesión 3)</a:t>
+              <a:t>.  (sesión 3)</a:t>
             </a:r>
           </a:p>
         </p:txBody>
@@ -7022,7 +6842,7 @@
                 </a:solidFill>
                 <a:latin typeface="Nunito Sans"/>
               </a:rPr>
-              <a:t>Una chica: «Podríamos dejar el móvil en la mochila durante la comida». Un chico: «Claro, tú quieres prohibir los móviles y volver a la Edad Media».</a:t>
+              <a:t>«Convencedme de que hoy no ponga deberes.» «Porque no.» «Porque eres el mejor profe.» «Porque mañana tenemos examen de Matemáticas.»</a:t>
             </a:r>
           </a:p>
         </p:txBody>
@@ -7061,7 +6881,7 @@
                 </a:solidFill>
                 <a:latin typeface="Nunito Sans"/>
               </a:rPr>
-              <a:t>¿Ha dicho eso la chica? ¿Contra qué idea está peleando el chico?</a:t>
+              <a:t>¿Cuál te parece una razón de verdad?</a:t>
             </a:r>
           </a:p>
         </p:txBody>
@@ -7165,7 +6985,7 @@
                 </a:solidFill>
                 <a:latin typeface="Fredoka"/>
               </a:rPr>
-              <a:t>Qué es el hombre de paja</a:t>
+              <a:t>Tres preguntas para una razón</a:t>
             </a:r>
           </a:p>
         </p:txBody>
@@ -7230,7 +7050,7 @@
                 </a:solidFill>
                 <a:latin typeface="Nunito Sans"/>
               </a:rPr>
-              <a:t>BLOQUE 1 · QUÉ ES EL HOMBRE DE PAJA</a:t>
+              <a:t>BLOQUE 1 · TRES PREGUNTAS PARA UNA RAZÓN</a:t>
             </a:r>
           </a:p>
         </p:txBody>
@@ -7269,57 +7089,14 @@
                 </a:solidFill>
                 <a:latin typeface="Fredoka"/>
               </a:rPr>
-              <a:t>Hombre de paja</a:t>
-            </a:r>
-          </a:p>
-        </p:txBody>
-      </p:sp>
-      <p:sp>
-        <p:nvSpPr>
-          <p:cNvPr id="4" name="Rectangle 3"/>
-          <p:cNvSpPr/>
-          <p:nvPr/>
-        </p:nvSpPr>
-        <p:spPr>
-          <a:xfrm>
-            <a:off x="640000" y="1650000"/>
-            <a:ext cx="10912000" cy="1150000"/>
-          </a:xfrm>
-          <a:prstGeom prst="rect">
-            <a:avLst/>
-          </a:prstGeom>
-          <a:solidFill>
-            <a:srgbClr val="EAF0F7"/>
-          </a:solidFill>
-          <a:ln>
-            <a:noFill/>
-          </a:ln>
-        </p:spPr>
-        <p:style>
-          <a:lnRef idx="1">
-            <a:schemeClr val="accent1"/>
-          </a:lnRef>
-          <a:fillRef idx="3">
-            <a:schemeClr val="accent1"/>
-          </a:fillRef>
-          <a:effectRef idx="2">
-            <a:schemeClr val="accent1"/>
-          </a:effectRef>
-          <a:fontRef idx="minor">
-            <a:schemeClr val="lt1"/>
-          </a:fontRef>
-        </p:style>
-        <p:txBody>
-          <a:bodyPr rtlCol="0" anchor="ctr"/>
-          <a:lstStyle/>
-          <a:p>
-            <a:pPr algn="ctr"/>
-          </a:p>
-        </p:txBody>
-      </p:sp>
-      <p:sp>
-        <p:nvSpPr>
-          <p:cNvPr id="5" name="TextBox 4"/>
+              <a:t>Tres preguntas, en orden</a:t>
+            </a:r>
+          </a:p>
+        </p:txBody>
+      </p:sp>
+      <p:sp>
+        <p:nvSpPr>
+          <p:cNvPr id="4" name="TextBox 3"/>
           <p:cNvSpPr txBox="1"/>
           <p:nvPr/>
         </p:nvSpPr>
@@ -7335,6 +7112,63 @@
         </p:spPr>
         <p:txBody>
           <a:bodyPr wrap="square" anchor="ctr">
+            <a:spAutoFit/>
+          </a:bodyPr>
+          <a:lstStyle/>
+          <a:p>
+            <a:pPr>
+              <a:spcAft>
+                <a:spcPts val="1080"/>
+              </a:spcAft>
+            </a:pPr>
+            <a:r>
+              <a:rPr sz="2400" b="0">
+                <a:solidFill>
+                  <a:srgbClr val="1F2A44"/>
+                </a:solidFill>
+                <a:latin typeface="Nunito Sans"/>
+              </a:rPr>
+              <a:t>Se hacen </a:t>
+            </a:r>
+            <a:r>
+              <a:rPr sz="2400" b="1">
+                <a:solidFill>
+                  <a:srgbClr val="1F2A44"/>
+                </a:solidFill>
+                <a:latin typeface="Nunito Sans"/>
+              </a:rPr>
+              <a:t>en orden</a:t>
+            </a:r>
+            <a:r>
+              <a:rPr sz="2400" b="0">
+                <a:solidFill>
+                  <a:srgbClr val="1F2A44"/>
+                </a:solidFill>
+                <a:latin typeface="Nunito Sans"/>
+              </a:rPr>
+              <a:t>. Si falla una, la razón no sirve para esa conclusión.</a:t>
+            </a:r>
+          </a:p>
+        </p:txBody>
+      </p:sp>
+      <p:sp>
+        <p:nvSpPr>
+          <p:cNvPr id="5" name="TextBox 4"/>
+          <p:cNvSpPr txBox="1"/>
+          <p:nvPr/>
+        </p:nvSpPr>
+        <p:spPr>
+          <a:xfrm>
+            <a:off x="640000" y="3000000"/>
+            <a:ext cx="10912000" cy="3458000"/>
+          </a:xfrm>
+          <a:prstGeom prst="rect">
+            <a:avLst/>
+          </a:prstGeom>
+          <a:noFill/>
+        </p:spPr>
+        <p:txBody>
+          <a:bodyPr wrap="square">
             <a:spAutoFit/>
           </a:bodyPr>
           <a:lstStyle/>
@@ -7347,36 +7181,40 @@
             <a:r>
               <a:rPr sz="2800" b="1">
                 <a:solidFill>
+                  <a:srgbClr val="E8793A"/>
+                </a:solidFill>
+                <a:latin typeface="Nunito Sans"/>
+              </a:rPr>
+              <a:t>• </a:t>
+            </a:r>
+            <a:r>
+              <a:rPr sz="2800" b="0">
+                <a:solidFill>
                   <a:srgbClr val="1F2A44"/>
                 </a:solidFill>
                 <a:latin typeface="Nunito Sans"/>
               </a:rPr>
-              <a:t>Deformar la idea del otro, exagerándola o cambiándola, para atacar esa versión falsa en lugar de la real.</a:t>
-            </a:r>
-          </a:p>
-        </p:txBody>
-      </p:sp>
-      <p:sp>
-        <p:nvSpPr>
-          <p:cNvPr id="6" name="TextBox 5"/>
-          <p:cNvSpPr txBox="1"/>
-          <p:nvPr/>
-        </p:nvSpPr>
-        <p:spPr>
-          <a:xfrm>
-            <a:off x="640000" y="3000000"/>
-            <a:ext cx="10912000" cy="3458000"/>
-          </a:xfrm>
-          <a:prstGeom prst="rect">
-            <a:avLst/>
-          </a:prstGeom>
-          <a:noFill/>
-        </p:spPr>
-        <p:txBody>
-          <a:bodyPr wrap="square">
-            <a:spAutoFit/>
-          </a:bodyPr>
-          <a:lstStyle/>
+              <a:t>1. </a:t>
+            </a:r>
+            <a:r>
+              <a:rPr sz="2800" b="1">
+                <a:solidFill>
+                  <a:srgbClr val="1F2A44"/>
+                </a:solidFill>
+                <a:latin typeface="Nunito Sans"/>
+              </a:rPr>
+              <a:t>¿Es verdad?</a:t>
+            </a:r>
+            <a:r>
+              <a:rPr sz="2800" b="0">
+                <a:solidFill>
+                  <a:srgbClr val="1F2A44"/>
+                </a:solidFill>
+                <a:latin typeface="Nunito Sans"/>
+              </a:rPr>
+              <a:t> ¿O, al menos, es creíble?</a:t>
+            </a:r>
+          </a:p>
           <a:p>
             <a:pPr>
               <a:spcAft>
@@ -7399,7 +7237,25 @@
                 </a:solidFill>
                 <a:latin typeface="Nunito Sans"/>
               </a:rPr>
-              <a:t>Un muñeco de paja se parece a una persona</a:t>
+              <a:t>2. </a:t>
+            </a:r>
+            <a:r>
+              <a:rPr sz="2800" b="1">
+                <a:solidFill>
+                  <a:srgbClr val="1F2A44"/>
+                </a:solidFill>
+                <a:latin typeface="Nunito Sans"/>
+              </a:rPr>
+              <a:t>¿Viene a cuento?</a:t>
+            </a:r>
+            <a:r>
+              <a:rPr sz="2800" b="0">
+                <a:solidFill>
+                  <a:srgbClr val="1F2A44"/>
+                </a:solidFill>
+                <a:latin typeface="Nunito Sans"/>
+              </a:rPr>
+              <a:t> Es decir: ¿tiene que ver con la conclusión?</a:t>
             </a:r>
           </a:p>
           <a:p>
@@ -7424,7 +7280,25 @@
                 </a:solidFill>
                 <a:latin typeface="Nunito Sans"/>
               </a:rPr>
-              <a:t>Pero se tumba de un golpe</a:t>
+              <a:t>3. </a:t>
+            </a:r>
+            <a:r>
+              <a:rPr sz="2800" b="1">
+                <a:solidFill>
+                  <a:srgbClr val="1F2A44"/>
+                </a:solidFill>
+                <a:latin typeface="Nunito Sans"/>
+              </a:rPr>
+              <a:t>¿Es suficiente?</a:t>
+            </a:r>
+            <a:r>
+              <a:rPr sz="2800" b="0">
+                <a:solidFill>
+                  <a:srgbClr val="1F2A44"/>
+                </a:solidFill>
+                <a:latin typeface="Nunito Sans"/>
+              </a:rPr>
+              <a:t> ¿Basta, o hace falta más?</a:t>
             </a:r>
           </a:p>
           <a:p>
@@ -7449,7 +7323,7 @@
                 </a:solidFill>
                 <a:latin typeface="Nunito Sans"/>
               </a:rPr>
-              <a:t>Pregunta: </a:t>
+              <a:t>Una </a:t>
             </a:r>
             <a:r>
               <a:rPr sz="2800" b="1">
@@ -7458,7 +7332,16 @@
                 </a:solidFill>
                 <a:latin typeface="Nunito Sans"/>
               </a:rPr>
-              <a:t>¿es eso exactamente lo que he dicho?</a:t>
+              <a:t>buena</a:t>
+            </a:r>
+            <a:r>
+              <a:rPr sz="2800" b="0">
+                <a:solidFill>
+                  <a:srgbClr val="1F2A44"/>
+                </a:solidFill>
+                <a:latin typeface="Nunito Sans"/>
+              </a:rPr>
+              <a:t> razón pasa las tres</a:t>
             </a:r>
           </a:p>
         </p:txBody>
@@ -7523,7 +7406,7 @@
                 </a:solidFill>
                 <a:latin typeface="Nunito Sans"/>
               </a:rPr>
-              <a:t>BLOQUE 1 · QUÉ ES EL HOMBRE DE PAJA</a:t>
+              <a:t>BLOQUE 1 · TRES PREGUNTAS PARA UNA RAZÓN</a:t>
             </a:r>
           </a:p>
         </p:txBody>
@@ -7562,21 +7445,64 @@
                 </a:solidFill>
                 <a:latin typeface="Fredoka"/>
               </a:rPr>
-              <a:t>Tres formas de fabricar el muñeco</a:t>
-            </a:r>
-          </a:p>
-        </p:txBody>
-      </p:sp>
-      <p:sp>
-        <p:nvSpPr>
-          <p:cNvPr id="4" name="TextBox 3"/>
+              <a:t>1 · ¿Es verdad?</a:t>
+            </a:r>
+          </a:p>
+        </p:txBody>
+      </p:sp>
+      <p:sp>
+        <p:nvSpPr>
+          <p:cNvPr id="4" name="Rectangle 3"/>
+          <p:cNvSpPr/>
+          <p:nvPr/>
+        </p:nvSpPr>
+        <p:spPr>
+          <a:xfrm>
+            <a:off x="640000" y="1650000"/>
+            <a:ext cx="10912000" cy="1150000"/>
+          </a:xfrm>
+          <a:prstGeom prst="rect">
+            <a:avLst/>
+          </a:prstGeom>
+          <a:solidFill>
+            <a:srgbClr val="EAF0F7"/>
+          </a:solidFill>
+          <a:ln>
+            <a:noFill/>
+          </a:ln>
+        </p:spPr>
+        <p:style>
+          <a:lnRef idx="1">
+            <a:schemeClr val="accent1"/>
+          </a:lnRef>
+          <a:fillRef idx="3">
+            <a:schemeClr val="accent1"/>
+          </a:fillRef>
+          <a:effectRef idx="2">
+            <a:schemeClr val="accent1"/>
+          </a:effectRef>
+          <a:fontRef idx="minor">
+            <a:schemeClr val="lt1"/>
+          </a:fontRef>
+        </p:style>
+        <p:txBody>
+          <a:bodyPr rtlCol="0" anchor="ctr"/>
+          <a:lstStyle/>
+          <a:p>
+            <a:pPr algn="ctr"/>
+          </a:p>
+        </p:txBody>
+      </p:sp>
+      <p:sp>
+        <p:nvSpPr>
+          <p:cNvPr id="5" name="TextBox 4"/>
           <p:cNvSpPr txBox="1"/>
           <p:nvPr/>
         </p:nvSpPr>
         <p:spPr>
           <a:xfrm>
-            <a:off x="640000" y="1650000"/>
-            <a:ext cx="10912000" cy="4808000"/>
+            <a:off x="840000" y="1730000"/>
+            <a:ext cx="10512000" cy="1000000"/>
           </a:xfrm>
           <a:prstGeom prst="rect">
             <a:avLst/>
@@ -7584,7 +7510,7 @@
           <a:noFill/>
         </p:spPr>
         <p:txBody>
-          <a:bodyPr wrap="square">
+          <a:bodyPr wrap="square" anchor="ctr">
             <a:spAutoFit/>
           </a:bodyPr>
           <a:lstStyle/>
@@ -7597,11 +7523,11 @@
             <a:r>
               <a:rPr sz="2800" b="1">
                 <a:solidFill>
-                  <a:srgbClr val="E8793A"/>
-                </a:solidFill>
-                <a:latin typeface="Nunito Sans"/>
-              </a:rPr>
-              <a:t>• </a:t>
+                  <a:srgbClr val="1F2A44"/>
+                </a:solidFill>
+                <a:latin typeface="Nunito Sans"/>
+              </a:rPr>
+              <a:t>Si la razón es </a:t>
             </a:r>
             <a:r>
               <a:rPr sz="2800" b="1">
@@ -7610,18 +7536,41 @@
                 </a:solidFill>
                 <a:latin typeface="Nunito Sans"/>
               </a:rPr>
-              <a:t>Exagerar:</a:t>
-            </a:r>
-            <a:r>
-              <a:rPr sz="2800" b="0">
+              <a:t>falsa</a:t>
+            </a:r>
+            <a:r>
+              <a:rPr sz="2800" b="1">
                 <a:solidFill>
                   <a:srgbClr val="1F2A44"/>
                 </a:solidFill>
                 <a:latin typeface="Nunito Sans"/>
               </a:rPr>
-              <a:t> «menos azúcar» se convierte en «prohibir los dulces»</a:t>
-            </a:r>
-          </a:p>
+              <a:t>, el argumento se cae. No hace falta seguir.</a:t>
+            </a:r>
+          </a:p>
+        </p:txBody>
+      </p:sp>
+      <p:sp>
+        <p:nvSpPr>
+          <p:cNvPr id="6" name="TextBox 5"/>
+          <p:cNvSpPr txBox="1"/>
+          <p:nvPr/>
+        </p:nvSpPr>
+        <p:spPr>
+          <a:xfrm>
+            <a:off x="640000" y="3000000"/>
+            <a:ext cx="10912000" cy="3458000"/>
+          </a:xfrm>
+          <a:prstGeom prst="rect">
+            <a:avLst/>
+          </a:prstGeom>
+          <a:noFill/>
+        </p:spPr>
+        <p:txBody>
+          <a:bodyPr wrap="square">
+            <a:spAutoFit/>
+          </a:bodyPr>
+          <a:lstStyle/>
           <a:p>
             <a:pPr>
               <a:spcAft>
@@ -7638,22 +7587,13 @@
               <a:t>• </a:t>
             </a:r>
             <a:r>
-              <a:rPr sz="2800" b="1">
+              <a:rPr sz="2800" b="0">
                 <a:solidFill>
                   <a:srgbClr val="1F2A44"/>
                 </a:solidFill>
                 <a:latin typeface="Nunito Sans"/>
               </a:rPr>
-              <a:t>Recortar:</a:t>
-            </a:r>
-            <a:r>
-              <a:rPr sz="2800" b="0">
-                <a:solidFill>
-                  <a:srgbClr val="1F2A44"/>
-                </a:solidFill>
-                <a:latin typeface="Nunito Sans"/>
-              </a:rPr>
-              <a:t> quitar la parte que hace razonable la idea</a:t>
+              <a:t>«Con cuatro horas de sueño tienes de sobra»</a:t>
             </a:r>
           </a:p>
           <a:p>
@@ -7672,22 +7612,13 @@
               <a:t>• </a:t>
             </a:r>
             <a:r>
-              <a:rPr sz="2800" b="1">
+              <a:rPr sz="2800" b="0">
                 <a:solidFill>
                   <a:srgbClr val="1F2A44"/>
                 </a:solidFill>
                 <a:latin typeface="Nunito Sans"/>
               </a:rPr>
-              <a:t>Inventar:</a:t>
-            </a:r>
-            <a:r>
-              <a:rPr sz="2800" b="0">
-                <a:solidFill>
-                  <a:srgbClr val="1F2A44"/>
-                </a:solidFill>
-                <a:latin typeface="Nunito Sans"/>
-              </a:rPr>
-              <a:t> poner en su boca algo que no ha dicho</a:t>
+              <a:t>Falso: a tu edad se recomiendan entre 8 y 10 horas</a:t>
             </a:r>
           </a:p>
         </p:txBody>
@@ -7752,7 +7683,7 @@
                 </a:solidFill>
                 <a:latin typeface="Nunito Sans"/>
               </a:rPr>
-              <a:t>BLOQUE 1 · QUÉ ES EL HOMBRE DE PAJA</a:t>
+              <a:t>BLOQUE 1 · TRES PREGUNTAS PARA UNA RAZÓN</a:t>
             </a:r>
           </a:p>
         </p:txBody>
@@ -7791,221 +7722,184 @@
                 </a:solidFill>
                 <a:latin typeface="Fredoka"/>
               </a:rPr>
-              <a:t>Lo que dijo y lo que atacan</a:t>
-            </a:r>
-          </a:p>
-        </p:txBody>
-      </p:sp>
-      <p:graphicFrame>
-        <p:nvGraphicFramePr>
-          <p:cNvPr id="4" name="Table 3"/>
-          <p:cNvGraphicFramePr>
-            <a:graphicFrameLocks noGrp="1"/>
-          </p:cNvGraphicFramePr>
+              <a:t>2 · ¿Viene a cuento?</a:t>
+            </a:r>
+          </a:p>
+        </p:txBody>
+      </p:sp>
+      <p:sp>
+        <p:nvSpPr>
+          <p:cNvPr id="4" name="Rectangle 3"/>
+          <p:cNvSpPr/>
           <p:nvPr/>
-        </p:nvGraphicFramePr>
-        <p:xfrm>
-          <a:off x="640000" y="1700000"/>
-          <a:ext cx="10912000" cy="2400000"/>
-        </p:xfrm>
-        <a:graphic>
-          <a:graphicData uri="http://schemas.openxmlformats.org/drawingml/2006/table">
-            <a:tbl>
-              <a:tblPr firstRow="1" bandRow="1">
-                <a:tableStyleId>{5C22544A-7EE6-4342-B048-85BDC9FD1C3A}</a:tableStyleId>
-              </a:tblPr>
-              <a:tblGrid>
-                <a:gridCol w="5456000"/>
-                <a:gridCol w="5456000"/>
-              </a:tblGrid>
-              <a:tr h="600000">
-                <a:tc>
-                  <a:txBody>
-                    <a:bodyPr/>
-                    <a:lstStyle/>
-                    <a:p>
-                      <a:r>
-                        <a:rPr sz="2000" b="1">
-                          <a:solidFill>
-                            <a:srgbClr val="FBF7EF"/>
-                          </a:solidFill>
-                          <a:latin typeface="Fredoka"/>
-                        </a:rPr>
-                        <a:t>Lo que dijo</a:t>
-                      </a:r>
-                    </a:p>
-                  </a:txBody>
-                  <a:tcPr>
-                    <a:solidFill>
-                      <a:srgbClr val="1F2A44"/>
-                    </a:solidFill>
-                  </a:tcPr>
-                </a:tc>
-                <a:tc>
-                  <a:txBody>
-                    <a:bodyPr/>
-                    <a:lstStyle/>
-                    <a:p>
-                      <a:r>
-                        <a:rPr sz="2000" b="1">
-                          <a:solidFill>
-                            <a:srgbClr val="FBF7EF"/>
-                          </a:solidFill>
-                          <a:latin typeface="Fredoka"/>
-                        </a:rPr>
-                        <a:t>El muñeco de paja</a:t>
-                      </a:r>
-                    </a:p>
-                  </a:txBody>
-                  <a:tcPr>
-                    <a:solidFill>
-                      <a:srgbClr val="1F2A44"/>
-                    </a:solidFill>
-                  </a:tcPr>
-                </a:tc>
-              </a:tr>
-              <a:tr h="600000">
-                <a:tc>
-                  <a:txBody>
-                    <a:bodyPr/>
-                    <a:lstStyle/>
-                    <a:p>
-                      <a:r>
-                        <a:rPr sz="2000" b="0">
-                          <a:solidFill>
-                            <a:srgbClr val="1F2A44"/>
-                          </a:solidFill>
-                          <a:latin typeface="Nunito Sans"/>
-                        </a:rPr>
-                        <a:t>«Podríamos bajar la música en el patio»</a:t>
-                      </a:r>
-                    </a:p>
-                  </a:txBody>
-                  <a:tcPr>
-                    <a:solidFill>
-                      <a:srgbClr val="FFFFFF"/>
-                    </a:solidFill>
-                  </a:tcPr>
-                </a:tc>
-                <a:tc>
-                  <a:txBody>
-                    <a:bodyPr/>
-                    <a:lstStyle/>
-                    <a:p>
-                      <a:r>
-                        <a:rPr sz="2000" b="0">
-                          <a:solidFill>
-                            <a:srgbClr val="1F2A44"/>
-                          </a:solidFill>
-                          <a:latin typeface="Nunito Sans"/>
-                        </a:rPr>
-                        <a:t>«Quiere que el recreo sea una biblioteca»</a:t>
-                      </a:r>
-                    </a:p>
-                  </a:txBody>
-                  <a:tcPr>
-                    <a:solidFill>
-                      <a:srgbClr val="FFFFFF"/>
-                    </a:solidFill>
-                  </a:tcPr>
-                </a:tc>
-              </a:tr>
-              <a:tr h="600000">
-                <a:tc>
-                  <a:txBody>
-                    <a:bodyPr/>
-                    <a:lstStyle/>
-                    <a:p>
-                      <a:r>
-                        <a:rPr sz="2000" b="0">
-                          <a:solidFill>
-                            <a:srgbClr val="1F2A44"/>
-                          </a:solidFill>
-                          <a:latin typeface="Nunito Sans"/>
-                        </a:rPr>
-                        <a:t>«Estoy cansada, hoy no salgo»</a:t>
-                      </a:r>
-                    </a:p>
-                  </a:txBody>
-                  <a:tcPr>
-                    <a:solidFill>
-                      <a:srgbClr val="EAF0F7"/>
-                    </a:solidFill>
-                  </a:tcPr>
-                </a:tc>
-                <a:tc>
-                  <a:txBody>
-                    <a:bodyPr/>
-                    <a:lstStyle/>
-                    <a:p>
-                      <a:r>
-                        <a:rPr sz="2000" b="0">
-                          <a:solidFill>
-                            <a:srgbClr val="1F2A44"/>
-                          </a:solidFill>
-                          <a:latin typeface="Nunito Sans"/>
-                        </a:rPr>
-                        <a:t>«Ya no te importa la cuadrilla»</a:t>
-                      </a:r>
-                    </a:p>
-                  </a:txBody>
-                  <a:tcPr>
-                    <a:solidFill>
-                      <a:srgbClr val="EAF0F7"/>
-                    </a:solidFill>
-                  </a:tcPr>
-                </a:tc>
-              </a:tr>
-              <a:tr h="600000">
-                <a:tc>
-                  <a:txBody>
-                    <a:bodyPr/>
-                    <a:lstStyle/>
-                    <a:p>
-                      <a:r>
-                        <a:rPr sz="2000" b="0">
-                          <a:solidFill>
-                            <a:srgbClr val="1F2A44"/>
-                          </a:solidFill>
-                          <a:latin typeface="Nunito Sans"/>
-                        </a:rPr>
-                        <a:t>«Este juego tiene demasiados anuncios»</a:t>
-                      </a:r>
-                    </a:p>
-                  </a:txBody>
-                  <a:tcPr>
-                    <a:solidFill>
-                      <a:srgbClr val="FFFFFF"/>
-                    </a:solidFill>
-                  </a:tcPr>
-                </a:tc>
-                <a:tc>
-                  <a:txBody>
-                    <a:bodyPr/>
-                    <a:lstStyle/>
-                    <a:p>
-                      <a:r>
-                        <a:rPr sz="2000" b="0">
-                          <a:solidFill>
-                            <a:srgbClr val="1F2A44"/>
-                          </a:solidFill>
-                          <a:latin typeface="Nunito Sans"/>
-                        </a:rPr>
-                        <a:t>«Odias los videojuegos»</a:t>
-                      </a:r>
-                    </a:p>
-                  </a:txBody>
-                  <a:tcPr>
-                    <a:solidFill>
-                      <a:srgbClr val="FFFFFF"/>
-                    </a:solidFill>
-                  </a:tcPr>
-                </a:tc>
-              </a:tr>
-            </a:tbl>
-          </a:graphicData>
-        </a:graphic>
-      </p:graphicFrame>
+        </p:nvSpPr>
+        <p:spPr>
+          <a:xfrm>
+            <a:off x="640000" y="1650000"/>
+            <a:ext cx="10912000" cy="1150000"/>
+          </a:xfrm>
+          <a:prstGeom prst="rect">
+            <a:avLst/>
+          </a:prstGeom>
+          <a:solidFill>
+            <a:srgbClr val="EAF0F7"/>
+          </a:solidFill>
+          <a:ln>
+            <a:noFill/>
+          </a:ln>
+        </p:spPr>
+        <p:style>
+          <a:lnRef idx="1">
+            <a:schemeClr val="accent1"/>
+          </a:lnRef>
+          <a:fillRef idx="3">
+            <a:schemeClr val="accent1"/>
+          </a:fillRef>
+          <a:effectRef idx="2">
+            <a:schemeClr val="accent1"/>
+          </a:effectRef>
+          <a:fontRef idx="minor">
+            <a:schemeClr val="lt1"/>
+          </a:fontRef>
+        </p:style>
+        <p:txBody>
+          <a:bodyPr rtlCol="0" anchor="ctr"/>
+          <a:lstStyle/>
+          <a:p>
+            <a:pPr algn="ctr"/>
+          </a:p>
+        </p:txBody>
+      </p:sp>
+      <p:sp>
+        <p:nvSpPr>
+          <p:cNvPr id="5" name="TextBox 4"/>
+          <p:cNvSpPr txBox="1"/>
+          <p:nvPr/>
+        </p:nvSpPr>
+        <p:spPr>
+          <a:xfrm>
+            <a:off x="840000" y="1730000"/>
+            <a:ext cx="10512000" cy="1000000"/>
+          </a:xfrm>
+          <a:prstGeom prst="rect">
+            <a:avLst/>
+          </a:prstGeom>
+          <a:noFill/>
+        </p:spPr>
+        <p:txBody>
+          <a:bodyPr wrap="square" anchor="ctr">
+            <a:spAutoFit/>
+          </a:bodyPr>
+          <a:lstStyle/>
+          <a:p>
+            <a:pPr>
+              <a:spcAft>
+                <a:spcPts val="1260"/>
+              </a:spcAft>
+            </a:pPr>
+            <a:r>
+              <a:rPr sz="2800" b="1">
+                <a:solidFill>
+                  <a:srgbClr val="1F2A44"/>
+                </a:solidFill>
+                <a:latin typeface="Nunito Sans"/>
+              </a:rPr>
+              <a:t>Una razón puede ser verdad y </a:t>
+            </a:r>
+            <a:r>
+              <a:rPr sz="2800" b="1">
+                <a:solidFill>
+                  <a:srgbClr val="1F2A44"/>
+                </a:solidFill>
+                <a:latin typeface="Nunito Sans"/>
+              </a:rPr>
+              <a:t>no tener que ver</a:t>
+            </a:r>
+            <a:r>
+              <a:rPr sz="2800" b="1">
+                <a:solidFill>
+                  <a:srgbClr val="1F2A44"/>
+                </a:solidFill>
+                <a:latin typeface="Nunito Sans"/>
+              </a:rPr>
+              <a:t> con la conclusión.</a:t>
+            </a:r>
+          </a:p>
+        </p:txBody>
+      </p:sp>
+      <p:sp>
+        <p:nvSpPr>
+          <p:cNvPr id="6" name="TextBox 5"/>
+          <p:cNvSpPr txBox="1"/>
+          <p:nvPr/>
+        </p:nvSpPr>
+        <p:spPr>
+          <a:xfrm>
+            <a:off x="640000" y="3000000"/>
+            <a:ext cx="10912000" cy="3458000"/>
+          </a:xfrm>
+          <a:prstGeom prst="rect">
+            <a:avLst/>
+          </a:prstGeom>
+          <a:noFill/>
+        </p:spPr>
+        <p:txBody>
+          <a:bodyPr wrap="square">
+            <a:spAutoFit/>
+          </a:bodyPr>
+          <a:lstStyle/>
+          <a:p>
+            <a:pPr>
+              <a:spcAft>
+                <a:spcPts val="1260"/>
+              </a:spcAft>
+            </a:pPr>
+            <a:r>
+              <a:rPr sz="2800" b="1">
+                <a:solidFill>
+                  <a:srgbClr val="E8793A"/>
+                </a:solidFill>
+                <a:latin typeface="Nunito Sans"/>
+              </a:rPr>
+              <a:t>• </a:t>
+            </a:r>
+            <a:r>
+              <a:rPr sz="2800" b="0">
+                <a:solidFill>
+                  <a:srgbClr val="1F2A44"/>
+                </a:solidFill>
+                <a:latin typeface="Nunito Sans"/>
+              </a:rPr>
+              <a:t>«Un chico debe ser delegado porque es el más alto»</a:t>
+            </a:r>
+          </a:p>
+          <a:p>
+            <a:pPr>
+              <a:spcAft>
+                <a:spcPts val="1260"/>
+              </a:spcAft>
+            </a:pPr>
+            <a:r>
+              <a:rPr sz="2800" b="1">
+                <a:solidFill>
+                  <a:srgbClr val="E8793A"/>
+                </a:solidFill>
+                <a:latin typeface="Nunito Sans"/>
+              </a:rPr>
+              <a:t>• </a:t>
+            </a:r>
+            <a:r>
+              <a:rPr sz="2800" b="0">
+                <a:solidFill>
+                  <a:srgbClr val="1F2A44"/>
+                </a:solidFill>
+                <a:latin typeface="Nunito Sans"/>
+              </a:rPr>
+              <a:t>Puede ser verdad, pero la altura no importa para ser delegado</a:t>
+            </a:r>
+          </a:p>
+        </p:txBody>
+      </p:sp>
     </p:spTree>
   </p:cSld>
   <p:clrMapOvr>
@@ -8020,7 +7914,7 @@
     <p:bg>
       <p:bgPr>
         <a:solidFill>
-          <a:srgbClr val="1F2A44"/>
+          <a:srgbClr val="FBF7EF"/>
         </a:solidFill>
         <a:effectLst/>
       </p:bgPr>
@@ -8040,8 +7934,8 @@
         </p:nvSpPr>
         <p:spPr>
           <a:xfrm>
-            <a:off x="640000" y="2300000"/>
-            <a:ext cx="10912000" cy="500000"/>
+            <a:off x="640000" y="380000"/>
+            <a:ext cx="10912000" cy="420000"/>
           </a:xfrm>
           <a:prstGeom prst="rect">
             <a:avLst/>
@@ -8056,17 +7950,17 @@
           <a:p>
             <a:pPr>
               <a:spcAft>
-                <a:spcPts val="810"/>
+                <a:spcPts val="630"/>
               </a:spcAft>
             </a:pPr>
             <a:r>
-              <a:rPr sz="1800" b="1">
-                <a:solidFill>
-                  <a:srgbClr val="F4B183"/>
-                </a:solidFill>
-                <a:latin typeface="Nunito Sans"/>
-              </a:rPr>
-              <a:t>BLOQUE 2</a:t>
+              <a:rPr sz="1400" b="1">
+                <a:solidFill>
+                  <a:srgbClr val="E8793A"/>
+                </a:solidFill>
+                <a:latin typeface="Nunito Sans"/>
+              </a:rPr>
+              <a:t>BLOQUE 1 · TRES PREGUNTAS PARA UNA RAZÓN</a:t>
             </a:r>
           </a:p>
         </p:txBody>
@@ -8079,7 +7973,7 @@
         </p:nvSpPr>
         <p:spPr>
           <a:xfrm>
-            <a:off x="640000" y="2800000"/>
+            <a:off x="640000" y="760000"/>
             <a:ext cx="10912000" cy="800000"/>
           </a:xfrm>
           <a:prstGeom prst="rect">
@@ -8095,17 +7989,190 @@
           <a:p>
             <a:pPr>
               <a:spcAft>
-                <a:spcPts val="2160"/>
+                <a:spcPts val="1710"/>
               </a:spcAft>
             </a:pPr>
             <a:r>
-              <a:rPr sz="4800" b="1">
-                <a:solidFill>
-                  <a:srgbClr val="FBF7EF"/>
+              <a:rPr sz="3800" b="1">
+                <a:solidFill>
+                  <a:srgbClr val="1F2A44"/>
                 </a:solidFill>
                 <a:latin typeface="Fredoka"/>
               </a:rPr>
-              <a:t>Casos resueltos</a:t>
+              <a:t>3 · ¿Es suficiente?</a:t>
+            </a:r>
+          </a:p>
+        </p:txBody>
+      </p:sp>
+      <p:sp>
+        <p:nvSpPr>
+          <p:cNvPr id="4" name="Rectangle 3"/>
+          <p:cNvSpPr/>
+          <p:nvPr/>
+        </p:nvSpPr>
+        <p:spPr>
+          <a:xfrm>
+            <a:off x="640000" y="1650000"/>
+            <a:ext cx="10912000" cy="1150000"/>
+          </a:xfrm>
+          <a:prstGeom prst="rect">
+            <a:avLst/>
+          </a:prstGeom>
+          <a:solidFill>
+            <a:srgbClr val="EAF0F7"/>
+          </a:solidFill>
+          <a:ln>
+            <a:noFill/>
+          </a:ln>
+        </p:spPr>
+        <p:style>
+          <a:lnRef idx="1">
+            <a:schemeClr val="accent1"/>
+          </a:lnRef>
+          <a:fillRef idx="3">
+            <a:schemeClr val="accent1"/>
+          </a:fillRef>
+          <a:effectRef idx="2">
+            <a:schemeClr val="accent1"/>
+          </a:effectRef>
+          <a:fontRef idx="minor">
+            <a:schemeClr val="lt1"/>
+          </a:fontRef>
+        </p:style>
+        <p:txBody>
+          <a:bodyPr rtlCol="0" anchor="ctr"/>
+          <a:lstStyle/>
+          <a:p>
+            <a:pPr algn="ctr"/>
+          </a:p>
+        </p:txBody>
+      </p:sp>
+      <p:sp>
+        <p:nvSpPr>
+          <p:cNvPr id="5" name="TextBox 4"/>
+          <p:cNvSpPr txBox="1"/>
+          <p:nvPr/>
+        </p:nvSpPr>
+        <p:spPr>
+          <a:xfrm>
+            <a:off x="840000" y="1730000"/>
+            <a:ext cx="10512000" cy="1000000"/>
+          </a:xfrm>
+          <a:prstGeom prst="rect">
+            <a:avLst/>
+          </a:prstGeom>
+          <a:noFill/>
+        </p:spPr>
+        <p:txBody>
+          <a:bodyPr wrap="square" anchor="ctr">
+            <a:spAutoFit/>
+          </a:bodyPr>
+          <a:lstStyle/>
+          <a:p>
+            <a:pPr>
+              <a:spcAft>
+                <a:spcPts val="1260"/>
+              </a:spcAft>
+            </a:pPr>
+            <a:r>
+              <a:rPr sz="2800" b="1">
+                <a:solidFill>
+                  <a:srgbClr val="1F2A44"/>
+                </a:solidFill>
+                <a:latin typeface="Nunito Sans"/>
+              </a:rPr>
+              <a:t>Una razón puede ser verdad y venir a cuento, pero </a:t>
+            </a:r>
+            <a:r>
+              <a:rPr sz="2800" b="1">
+                <a:solidFill>
+                  <a:srgbClr val="1F2A44"/>
+                </a:solidFill>
+                <a:latin typeface="Nunito Sans"/>
+              </a:rPr>
+              <a:t>no bastar</a:t>
+            </a:r>
+            <a:r>
+              <a:rPr sz="2800" b="1">
+                <a:solidFill>
+                  <a:srgbClr val="1F2A44"/>
+                </a:solidFill>
+                <a:latin typeface="Nunito Sans"/>
+              </a:rPr>
+              <a:t>.</a:t>
+            </a:r>
+          </a:p>
+        </p:txBody>
+      </p:sp>
+      <p:sp>
+        <p:nvSpPr>
+          <p:cNvPr id="6" name="TextBox 5"/>
+          <p:cNvSpPr txBox="1"/>
+          <p:nvPr/>
+        </p:nvSpPr>
+        <p:spPr>
+          <a:xfrm>
+            <a:off x="640000" y="3000000"/>
+            <a:ext cx="10912000" cy="3458000"/>
+          </a:xfrm>
+          <a:prstGeom prst="rect">
+            <a:avLst/>
+          </a:prstGeom>
+          <a:noFill/>
+        </p:spPr>
+        <p:txBody>
+          <a:bodyPr wrap="square">
+            <a:spAutoFit/>
+          </a:bodyPr>
+          <a:lstStyle/>
+          <a:p>
+            <a:pPr>
+              <a:spcAft>
+                <a:spcPts val="1260"/>
+              </a:spcAft>
+            </a:pPr>
+            <a:r>
+              <a:rPr sz="2800" b="1">
+                <a:solidFill>
+                  <a:srgbClr val="E8793A"/>
+                </a:solidFill>
+                <a:latin typeface="Nunito Sans"/>
+              </a:rPr>
+              <a:t>• </a:t>
+            </a:r>
+            <a:r>
+              <a:rPr sz="2800" b="0">
+                <a:solidFill>
+                  <a:srgbClr val="1F2A44"/>
+                </a:solidFill>
+                <a:latin typeface="Nunito Sans"/>
+              </a:rPr>
+              <a:t>«Los de esa clase son unos vagos: uno no trajo los deberes»</a:t>
+            </a:r>
+          </a:p>
+          <a:p>
+            <a:pPr>
+              <a:spcAft>
+                <a:spcPts val="1260"/>
+              </a:spcAft>
+            </a:pPr>
+            <a:r>
+              <a:rPr sz="2800" b="1">
+                <a:solidFill>
+                  <a:srgbClr val="E8793A"/>
+                </a:solidFill>
+                <a:latin typeface="Nunito Sans"/>
+              </a:rPr>
+              <a:t>• </a:t>
+            </a:r>
+            <a:r>
+              <a:rPr sz="2800" b="0">
+                <a:solidFill>
+                  <a:srgbClr val="1F2A44"/>
+                </a:solidFill>
+                <a:latin typeface="Nunito Sans"/>
+              </a:rPr>
+              <a:t>Un alumno, un día: no basta para hablar de toda una clase</a:t>
             </a:r>
           </a:p>
         </p:txBody>
